--- a/assets/figures-editable/c1-c2/c2-e33.pptx
+++ b/assets/figures-editable/c1-c2/c2-e33.pptx
@@ -7,7 +7,7 @@
   <p:sldIdLst>
     <p:sldId id="256" r:id="rId7"/>
   </p:sldIdLst>
-  <p:sldSz cx="11948160" cy="7924799" type="screen4x3"/>
+  <p:sldSz cx="12191695" cy="6858000" type="screen4x3"/>
   <p:notesSz cx="6858000" cy="9144000"/>
   <p:defaultTextStyle>
     <a:defPPr>
@@ -3098,14 +3098,14 @@
       <p:grpSpPr/>
       <p:sp>
         <p:nvSpPr>
-          <p:cNvPr id="2" name="text1" descr="sci-ppt:C2-E33-001"/>
+          <p:cNvPr id="2" name="C2-E33 text 0" descr="sci-ppt:o000"/>
           <p:cNvSpPr txBox="1"/>
           <p:nvPr/>
         </p:nvSpPr>
         <p:spPr>
           <a:xfrm>
-            <a:off x="316992" y="268224"/>
-            <a:ext cx="11277600" cy="359054"/>
+            <a:off x="274320" y="118872"/>
+            <a:ext cx="11612880" cy="340105"/>
           </a:xfrm>
           <a:prstGeom prst="rect">
             <a:avLst/>
@@ -3114,7 +3114,7 @@
           <a:effectLst/>
         </p:spPr>
         <p:txBody>
-          <a:bodyPr wrap="none" lIns="27432" rIns="27432" tIns="18288" bIns="18288" anchor="ctr">
+          <a:bodyPr wrap="none" lIns="18288" rIns="18288" tIns="18288" bIns="18288" anchor="t">
             <a:spAutoFit/>
           </a:bodyPr>
           <a:lstStyle/>
@@ -3125,91 +3125,651 @@
               </a:spcAft>
             </a:pPr>
             <a:r>
-              <a:rPr sz="1823" b="0" i="0">
+              <a:rPr sz="1900" b="1" i="0">
                 <a:solidFill>
                   <a:srgbClr val="8EDBD4"/>
                 </a:solidFill>
                 <a:latin typeface="Arial"/>
               </a:rPr>
-              <a:t>C2-E33 | Physical-variable diagram</a:t>
-            </a:r>
-          </a:p>
-        </p:txBody>
-      </p:sp>
-      <p:sp>
-        <p:nvSpPr>
-          <p:cNvPr id="3" name="ellipse2" descr="sci-ppt:C2-E33-002"/>
+              <a:t>C2-E33 · Original formulas for Defense 2</a:t>
+            </a:r>
+          </a:p>
+        </p:txBody>
+      </p:sp>
+      <p:sp>
+        <p:nvSpPr>
+          <p:cNvPr id="3" name="C2-E33 round_rect 1" descr="sci-ppt:o001"/>
           <p:cNvSpPr/>
           <p:nvPr/>
         </p:nvSpPr>
         <p:spPr>
           <a:xfrm>
-            <a:off x="1341120" y="1280160"/>
-            <a:ext cx="2804160" cy="2804160"/>
-          </a:xfrm>
-          <a:prstGeom prst="ellipse">
+            <a:off x="457200" y="1097280"/>
+            <a:ext cx="2468880" cy="1371600"/>
+          </a:xfrm>
+          <a:prstGeom prst="roundRect">
             <a:avLst/>
           </a:prstGeom>
           <a:solidFill>
             <a:srgbClr val="213E4B"/>
           </a:solidFill>
-          <a:ln w="21590">
+          <a:ln w="20320">
+            <a:solidFill>
+              <a:srgbClr val="8EDBD4"/>
+            </a:solidFill>
+          </a:ln>
+          <a:effectLst/>
+        </p:spPr>
+        <p:txBody>
+          <a:bodyPr rtlCol="0" anchor="ctr"/>
+          <a:lstStyle/>
+          <a:p>
+            <a:pPr algn="ctr"/>
+          </a:p>
+        </p:txBody>
+      </p:sp>
+      <p:sp>
+        <p:nvSpPr>
+          <p:cNvPr id="4" name="C2-E33 text 2" descr="sci-ppt:o002"/>
+          <p:cNvSpPr txBox="1"/>
+          <p:nvPr/>
+        </p:nvSpPr>
+        <p:spPr>
+          <a:xfrm>
+            <a:off x="530352" y="1152144"/>
+            <a:ext cx="2322576" cy="254889"/>
+          </a:xfrm>
+          <a:prstGeom prst="rect">
+            <a:avLst/>
+          </a:prstGeom>
+          <a:noFill/>
+          <a:effectLst/>
+        </p:spPr>
+        <p:txBody>
+          <a:bodyPr wrap="none" lIns="18288" rIns="18288" tIns="18288" bIns="18288" anchor="t">
+            <a:spAutoFit/>
+          </a:bodyPr>
+          <a:lstStyle/>
+          <a:p>
+            <a:pPr algn="ctr">
+              <a:spcAft>
+                <a:spcPts val="0"/>
+              </a:spcAft>
+            </a:pPr>
+            <a:r>
+              <a:rPr sz="1350" b="1" i="0">
+                <a:solidFill>
+                  <a:srgbClr val="8EDBD4"/>
+                </a:solidFill>
+                <a:latin typeface="Arial"/>
+              </a:rPr>
+              <a:t>Confinement</a:t>
+            </a:r>
+          </a:p>
+        </p:txBody>
+      </p:sp>
+      <p:sp>
+        <p:nvSpPr>
+          <p:cNvPr id="5" name="C2-E33 text 3" descr="sci-ppt:o003"/>
+          <p:cNvSpPr txBox="1"/>
+          <p:nvPr/>
+        </p:nvSpPr>
+        <p:spPr>
+          <a:xfrm>
+            <a:off x="530352" y="1425321"/>
+            <a:ext cx="2322576" cy="448563"/>
+          </a:xfrm>
+          <a:prstGeom prst="rect">
+            <a:avLst/>
+          </a:prstGeom>
+          <a:noFill/>
+          <a:effectLst/>
+        </p:spPr>
+        <p:txBody>
+          <a:bodyPr wrap="none" lIns="18288" rIns="18288" tIns="18288" bIns="18288" anchor="t">
+            <a:spAutoFit/>
+          </a:bodyPr>
+          <a:lstStyle/>
+          <a:p>
+            <a:pPr algn="ctr">
+              <a:spcAft>
+                <a:spcPts val="0"/>
+              </a:spcAft>
+            </a:pPr>
+            <a:r>
+              <a:rPr sz="1300" b="0" i="0">
+                <a:solidFill>
+                  <a:srgbClr val="E7F0F3"/>
+                </a:solidFill>
+                <a:latin typeface="Arial"/>
+              </a:rPr>
+              <a:t>p_d ≃ p_c + 2σ_pc/a +</a:t>
+            </a:r>
+          </a:p>
+          <a:p>
+            <a:pPr algn="ctr">
+              <a:spcAft>
+                <a:spcPts val="0"/>
+              </a:spcAft>
+            </a:pPr>
+            <a:r>
+              <a:rPr sz="1300" b="0" i="0">
+                <a:solidFill>
+                  <a:srgbClr val="E7F0F3"/>
+                </a:solidFill>
+                <a:latin typeface="Arial"/>
+              </a:rPr>
+              <a:t>Πₛₕₑₗₗ</a:t>
+            </a:r>
+          </a:p>
+        </p:txBody>
+      </p:sp>
+      <p:cxnSp>
+        <p:nvCxnSpPr>
+          <p:cNvPr id="6" name="C2-E33 arrow 4" descr="sci-ppt:o004"/>
+          <p:cNvCxnSpPr/>
+          <p:nvPr/>
+        </p:nvCxnSpPr>
+        <p:spPr>
+          <a:xfrm>
+            <a:off x="2953512" y="1783080"/>
+            <a:ext cx="402336" cy="0"/>
+          </a:xfrm>
+          <a:prstGeom prst="line">
+            <a:avLst/>
+          </a:prstGeom>
+          <a:ln w="27940">
+            <a:solidFill>
+              <a:srgbClr val="B4C7D2"/>
+            </a:solidFill>
+            <a:headEnd type="none" w="med" len="med"/>
+            <a:tailEnd type="triangle" w="med" len="med"/>
+          </a:ln>
+          <a:effectLst/>
+        </p:spPr>
+      </p:cxnSp>
+      <p:sp>
+        <p:nvSpPr>
+          <p:cNvPr id="7" name="C2-E33 round_rect 5" descr="sci-ppt:o005"/>
+          <p:cNvSpPr/>
+          <p:nvPr/>
+        </p:nvSpPr>
+        <p:spPr>
+          <a:xfrm>
+            <a:off x="3383280" y="1097280"/>
+            <a:ext cx="2468880" cy="1371600"/>
+          </a:xfrm>
+          <a:prstGeom prst="roundRect">
+            <a:avLst/>
+          </a:prstGeom>
+          <a:solidFill>
+            <a:srgbClr val="213E4B"/>
+          </a:solidFill>
+          <a:ln w="20320">
+            <a:solidFill>
+              <a:srgbClr val="F2B880"/>
+            </a:solidFill>
+          </a:ln>
+          <a:effectLst/>
+        </p:spPr>
+        <p:txBody>
+          <a:bodyPr rtlCol="0" anchor="ctr"/>
+          <a:lstStyle/>
+          <a:p>
+            <a:pPr algn="ctr"/>
+          </a:p>
+        </p:txBody>
+      </p:sp>
+      <p:sp>
+        <p:nvSpPr>
+          <p:cNvPr id="8" name="C2-E33 text 6" descr="sci-ppt:o006"/>
+          <p:cNvSpPr txBox="1"/>
+          <p:nvPr/>
+        </p:nvSpPr>
+        <p:spPr>
+          <a:xfrm>
+            <a:off x="3456432" y="1152144"/>
+            <a:ext cx="2322576" cy="254889"/>
+          </a:xfrm>
+          <a:prstGeom prst="rect">
+            <a:avLst/>
+          </a:prstGeom>
+          <a:noFill/>
+          <a:effectLst/>
+        </p:spPr>
+        <p:txBody>
+          <a:bodyPr wrap="none" lIns="18288" rIns="18288" tIns="18288" bIns="18288" anchor="t">
+            <a:spAutoFit/>
+          </a:bodyPr>
+          <a:lstStyle/>
+          <a:p>
+            <a:pPr algn="ctr">
+              <a:spcAft>
+                <a:spcPts val="0"/>
+              </a:spcAft>
+            </a:pPr>
+            <a:r>
+              <a:rPr sz="1350" b="1" i="0">
+                <a:solidFill>
+                  <a:srgbClr val="F2B880"/>
+                </a:solidFill>
+                <a:latin typeface="Arial"/>
+              </a:rPr>
+              <a:t>Superheat</a:t>
+            </a:r>
+          </a:p>
+        </p:txBody>
+      </p:sp>
+      <p:sp>
+        <p:nvSpPr>
+          <p:cNvPr id="9" name="C2-E33 text 7" descr="sci-ppt:o007"/>
+          <p:cNvSpPr txBox="1"/>
+          <p:nvPr/>
+        </p:nvSpPr>
+        <p:spPr>
+          <a:xfrm>
+            <a:off x="3456432" y="1425321"/>
+            <a:ext cx="2322576" cy="247142"/>
+          </a:xfrm>
+          <a:prstGeom prst="rect">
+            <a:avLst/>
+          </a:prstGeom>
+          <a:noFill/>
+          <a:effectLst/>
+        </p:spPr>
+        <p:txBody>
+          <a:bodyPr wrap="none" lIns="18288" rIns="18288" tIns="18288" bIns="18288" anchor="t">
+            <a:spAutoFit/>
+          </a:bodyPr>
+          <a:lstStyle/>
+          <a:p>
+            <a:pPr algn="ctr">
+              <a:spcAft>
+                <a:spcPts val="0"/>
+              </a:spcAft>
+            </a:pPr>
+            <a:r>
+              <a:rPr sz="1300" b="0" i="0">
+                <a:solidFill>
+                  <a:srgbClr val="E7F0F3"/>
+                </a:solidFill>
+                <a:latin typeface="Arial"/>
+              </a:rPr>
+              <a:t>Δpₙ = pₛₐₜ(Tᵢ) − p_d</a:t>
+            </a:r>
+          </a:p>
+        </p:txBody>
+      </p:sp>
+      <p:cxnSp>
+        <p:nvCxnSpPr>
+          <p:cNvPr id="10" name="C2-E33 arrow 8" descr="sci-ppt:o008"/>
+          <p:cNvCxnSpPr/>
+          <p:nvPr/>
+        </p:nvCxnSpPr>
+        <p:spPr>
+          <a:xfrm>
+            <a:off x="5879592" y="1783080"/>
+            <a:ext cx="402336" cy="0"/>
+          </a:xfrm>
+          <a:prstGeom prst="line">
+            <a:avLst/>
+          </a:prstGeom>
+          <a:ln w="27940">
+            <a:solidFill>
+              <a:srgbClr val="B4C7D2"/>
+            </a:solidFill>
+            <a:headEnd type="none" w="med" len="med"/>
+            <a:tailEnd type="triangle" w="med" len="med"/>
+          </a:ln>
+          <a:effectLst/>
+        </p:spPr>
+      </p:cxnSp>
+      <p:sp>
+        <p:nvSpPr>
+          <p:cNvPr id="11" name="C2-E33 round_rect 9" descr="sci-ppt:o009"/>
+          <p:cNvSpPr/>
+          <p:nvPr/>
+        </p:nvSpPr>
+        <p:spPr>
+          <a:xfrm>
+            <a:off x="6309360" y="1097280"/>
+            <a:ext cx="2468880" cy="1371600"/>
+          </a:xfrm>
+          <a:prstGeom prst="roundRect">
+            <a:avLst/>
+          </a:prstGeom>
+          <a:solidFill>
+            <a:srgbClr val="213E4B"/>
+          </a:solidFill>
+          <a:ln w="20320">
+            <a:solidFill>
+              <a:srgbClr val="7FC8F8"/>
+            </a:solidFill>
+          </a:ln>
+          <a:effectLst/>
+        </p:spPr>
+        <p:txBody>
+          <a:bodyPr rtlCol="0" anchor="ctr"/>
+          <a:lstStyle/>
+          <a:p>
+            <a:pPr algn="ctr"/>
+          </a:p>
+        </p:txBody>
+      </p:sp>
+      <p:sp>
+        <p:nvSpPr>
+          <p:cNvPr id="12" name="C2-E33 text 10" descr="sci-ppt:o010"/>
+          <p:cNvSpPr txBox="1"/>
+          <p:nvPr/>
+        </p:nvSpPr>
+        <p:spPr>
+          <a:xfrm>
+            <a:off x="6382512" y="1152144"/>
+            <a:ext cx="2322576" cy="254889"/>
+          </a:xfrm>
+          <a:prstGeom prst="rect">
+            <a:avLst/>
+          </a:prstGeom>
+          <a:noFill/>
+          <a:effectLst/>
+        </p:spPr>
+        <p:txBody>
+          <a:bodyPr wrap="none" lIns="18288" rIns="18288" tIns="18288" bIns="18288" anchor="t">
+            <a:spAutoFit/>
+          </a:bodyPr>
+          <a:lstStyle/>
+          <a:p>
+            <a:pPr algn="ctr">
+              <a:spcAft>
+                <a:spcPts val="0"/>
+              </a:spcAft>
+            </a:pPr>
+            <a:r>
+              <a:rPr sz="1350" b="1" i="0">
+                <a:solidFill>
+                  <a:srgbClr val="7FC8F8"/>
+                </a:solidFill>
+                <a:latin typeface="Arial"/>
+              </a:rPr>
+              <a:t>Critical radius</a:t>
+            </a:r>
+          </a:p>
+        </p:txBody>
+      </p:sp>
+      <p:sp>
+        <p:nvSpPr>
+          <p:cNvPr id="13" name="C2-E33 text 11" descr="sci-ppt:o011"/>
+          <p:cNvSpPr txBox="1"/>
+          <p:nvPr/>
+        </p:nvSpPr>
+        <p:spPr>
+          <a:xfrm>
+            <a:off x="6382512" y="1425321"/>
+            <a:ext cx="2322576" cy="247142"/>
+          </a:xfrm>
+          <a:prstGeom prst="rect">
+            <a:avLst/>
+          </a:prstGeom>
+          <a:noFill/>
+          <a:effectLst/>
+        </p:spPr>
+        <p:txBody>
+          <a:bodyPr wrap="none" lIns="18288" rIns="18288" tIns="18288" bIns="18288" anchor="t">
+            <a:spAutoFit/>
+          </a:bodyPr>
+          <a:lstStyle/>
+          <a:p>
+            <a:pPr algn="ctr">
+              <a:spcAft>
+                <a:spcPts val="0"/>
+              </a:spcAft>
+            </a:pPr>
+            <a:r>
+              <a:rPr sz="1300" b="0" i="0">
+                <a:solidFill>
+                  <a:srgbClr val="E7F0F3"/>
+                </a:solidFill>
+                <a:latin typeface="Arial"/>
+              </a:rPr>
+              <a:t>r* = 2σᵥₚ / Δpₙ</a:t>
+            </a:r>
+          </a:p>
+        </p:txBody>
+      </p:sp>
+      <p:cxnSp>
+        <p:nvCxnSpPr>
+          <p:cNvPr id="14" name="C2-E33 arrow 12" descr="sci-ppt:o012"/>
+          <p:cNvCxnSpPr/>
+          <p:nvPr/>
+        </p:nvCxnSpPr>
+        <p:spPr>
+          <a:xfrm>
+            <a:off x="8805672" y="1783080"/>
+            <a:ext cx="402336" cy="0"/>
+          </a:xfrm>
+          <a:prstGeom prst="line">
+            <a:avLst/>
+          </a:prstGeom>
+          <a:ln w="27940">
+            <a:solidFill>
+              <a:srgbClr val="B4C7D2"/>
+            </a:solidFill>
+            <a:headEnd type="none" w="med" len="med"/>
+            <a:tailEnd type="triangle" w="med" len="med"/>
+          </a:ln>
+          <a:effectLst/>
+        </p:spPr>
+      </p:cxnSp>
+      <p:sp>
+        <p:nvSpPr>
+          <p:cNvPr id="15" name="C2-E33 round_rect 13" descr="sci-ppt:o013"/>
+          <p:cNvSpPr/>
+          <p:nvPr/>
+        </p:nvSpPr>
+        <p:spPr>
+          <a:xfrm>
+            <a:off x="9235440" y="1097280"/>
+            <a:ext cx="2468880" cy="1371600"/>
+          </a:xfrm>
+          <a:prstGeom prst="roundRect">
+            <a:avLst/>
+          </a:prstGeom>
+          <a:solidFill>
+            <a:srgbClr val="213E4B"/>
+          </a:solidFill>
+          <a:ln w="20320">
+            <a:solidFill>
+              <a:srgbClr val="F28BA0"/>
+            </a:solidFill>
+          </a:ln>
+          <a:effectLst/>
+        </p:spPr>
+        <p:txBody>
+          <a:bodyPr rtlCol="0" anchor="ctr"/>
+          <a:lstStyle/>
+          <a:p>
+            <a:pPr algn="ctr"/>
+          </a:p>
+        </p:txBody>
+      </p:sp>
+      <p:sp>
+        <p:nvSpPr>
+          <p:cNvPr id="16" name="C2-E33 text 14" descr="sci-ppt:o014"/>
+          <p:cNvSpPr txBox="1"/>
+          <p:nvPr/>
+        </p:nvSpPr>
+        <p:spPr>
+          <a:xfrm>
+            <a:off x="9308592" y="1152144"/>
+            <a:ext cx="2322576" cy="254889"/>
+          </a:xfrm>
+          <a:prstGeom prst="rect">
+            <a:avLst/>
+          </a:prstGeom>
+          <a:noFill/>
+          <a:effectLst/>
+        </p:spPr>
+        <p:txBody>
+          <a:bodyPr wrap="none" lIns="18288" rIns="18288" tIns="18288" bIns="18288" anchor="t">
+            <a:spAutoFit/>
+          </a:bodyPr>
+          <a:lstStyle/>
+          <a:p>
+            <a:pPr algn="ctr">
+              <a:spcAft>
+                <a:spcPts val="0"/>
+              </a:spcAft>
+            </a:pPr>
+            <a:r>
+              <a:rPr sz="1350" b="1" i="0">
+                <a:solidFill>
+                  <a:srgbClr val="F28BA0"/>
+                </a:solidFill>
+                <a:latin typeface="Arial"/>
+              </a:rPr>
+              <a:t>Barrier</a:t>
+            </a:r>
+          </a:p>
+        </p:txBody>
+      </p:sp>
+      <p:sp>
+        <p:nvSpPr>
+          <p:cNvPr id="17" name="C2-E33 text 15" descr="sci-ppt:o015"/>
+          <p:cNvSpPr txBox="1"/>
+          <p:nvPr/>
+        </p:nvSpPr>
+        <p:spPr>
+          <a:xfrm>
+            <a:off x="9308592" y="1425321"/>
+            <a:ext cx="2322576" cy="247142"/>
+          </a:xfrm>
+          <a:prstGeom prst="rect">
+            <a:avLst/>
+          </a:prstGeom>
+          <a:noFill/>
+          <a:effectLst/>
+        </p:spPr>
+        <p:txBody>
+          <a:bodyPr wrap="none" lIns="18288" rIns="18288" tIns="18288" bIns="18288" anchor="t">
+            <a:spAutoFit/>
+          </a:bodyPr>
+          <a:lstStyle/>
+          <a:p>
+            <a:pPr algn="ctr">
+              <a:spcAft>
+                <a:spcPts val="0"/>
+              </a:spcAft>
+            </a:pPr>
+            <a:r>
+              <a:rPr sz="1300" b="0" i="0">
+                <a:solidFill>
+                  <a:srgbClr val="E7F0F3"/>
+                </a:solidFill>
+                <a:latin typeface="Arial"/>
+              </a:rPr>
+              <a:t>W* = 16π σᵥₚ³ / (3 Δpₙ²)</a:t>
+            </a:r>
+          </a:p>
+        </p:txBody>
+      </p:sp>
+      <p:cxnSp>
+        <p:nvCxnSpPr>
+          <p:cNvPr id="18" name="C2-E33 line 16" descr="sci-ppt:o016"/>
+          <p:cNvCxnSpPr/>
+          <p:nvPr/>
+        </p:nvCxnSpPr>
+        <p:spPr>
+          <a:xfrm>
+            <a:off x="914400" y="5394960"/>
+            <a:ext cx="5303520" cy="0"/>
+          </a:xfrm>
+          <a:prstGeom prst="line">
+            <a:avLst/>
+          </a:prstGeom>
+          <a:ln w="19050">
             <a:solidFill>
               <a:srgbClr val="B4C7D2"/>
             </a:solidFill>
           </a:ln>
           <a:effectLst/>
         </p:spPr>
-        <p:txBody>
-          <a:bodyPr rtlCol="0" anchor="ctr"/>
-          <a:lstStyle/>
-          <a:p>
-            <a:pPr algn="ctr"/>
-          </a:p>
-        </p:txBody>
-      </p:sp>
-      <p:sp>
-        <p:nvSpPr>
-          <p:cNvPr id="4" name="ellipse3" descr="sci-ppt:C2-E33-003"/>
-          <p:cNvSpPr/>
+      </p:cxnSp>
+      <p:cxnSp>
+        <p:nvCxnSpPr>
+          <p:cNvPr id="19" name="C2-E33 line 17" descr="sci-ppt:o017"/>
+          <p:cNvCxnSpPr/>
           <p:nvPr/>
-        </p:nvSpPr>
-        <p:spPr>
-          <a:xfrm>
-            <a:off x="2389632" y="2328672"/>
-            <a:ext cx="707136" cy="707136"/>
-          </a:xfrm>
-          <a:prstGeom prst="ellipse">
+        </p:nvCxnSpPr>
+        <p:spPr>
+          <a:xfrm>
+            <a:off x="914400" y="3017520"/>
+            <a:ext cx="0" cy="2377440"/>
+          </a:xfrm>
+          <a:prstGeom prst="line">
             <a:avLst/>
           </a:prstGeom>
-          <a:solidFill>
-            <a:srgbClr val="F6BC77"/>
-          </a:solidFill>
-          <a:ln w="21590">
+          <a:ln w="19050">
             <a:solidFill>
               <a:srgbClr val="B4C7D2"/>
             </a:solidFill>
           </a:ln>
           <a:effectLst/>
         </p:spPr>
-        <p:txBody>
-          <a:bodyPr rtlCol="0" anchor="ctr"/>
-          <a:lstStyle/>
-          <a:p>
-            <a:pPr algn="ctr"/>
-          </a:p>
-        </p:txBody>
-      </p:sp>
-      <p:sp>
-        <p:nvSpPr>
-          <p:cNvPr id="5" name="text4" descr="sci-ppt:C2-E33-004"/>
+      </p:cxnSp>
+      <p:cxnSp>
+        <p:nvCxnSpPr>
+          <p:cNvPr id="20" name="C2-E33 line 18" descr="sci-ppt:o018"/>
+          <p:cNvCxnSpPr/>
+          <p:nvPr/>
+        </p:nvCxnSpPr>
+        <p:spPr>
+          <a:xfrm>
+            <a:off x="914400" y="5394960"/>
+            <a:ext cx="0" cy="64008"/>
+          </a:xfrm>
+          <a:prstGeom prst="line">
+            <a:avLst/>
+          </a:prstGeom>
+          <a:ln w="12700">
+            <a:solidFill>
+              <a:srgbClr val="B4C7D2"/>
+            </a:solidFill>
+          </a:ln>
+          <a:effectLst/>
+        </p:spPr>
+      </p:cxnSp>
+      <p:cxnSp>
+        <p:nvCxnSpPr>
+          <p:cNvPr id="21" name="C2-E33 line 19" descr="sci-ppt:o019"/>
+          <p:cNvCxnSpPr/>
+          <p:nvPr/>
+        </p:nvCxnSpPr>
+        <p:spPr>
+          <a:xfrm>
+            <a:off x="914400" y="3017520"/>
+            <a:ext cx="0" cy="2377440"/>
+          </a:xfrm>
+          <a:prstGeom prst="line">
+            <a:avLst/>
+          </a:prstGeom>
+          <a:ln w="7620">
+            <a:solidFill>
+              <a:srgbClr val="2E4756"/>
+            </a:solidFill>
+          </a:ln>
+          <a:effectLst/>
+        </p:spPr>
+      </p:cxnSp>
+      <p:sp>
+        <p:nvSpPr>
+          <p:cNvPr id="22" name="C2-E33 text 20" descr="sci-ppt:o020"/>
           <p:cNvSpPr txBox="1"/>
           <p:nvPr/>
         </p:nvSpPr>
         <p:spPr>
           <a:xfrm>
-            <a:off x="1706880" y="853440"/>
-            <a:ext cx="4876800" cy="359054"/>
+            <a:off x="457200" y="5477256"/>
+            <a:ext cx="914400" cy="208407"/>
           </a:xfrm>
           <a:prstGeom prst="rect">
             <a:avLst/>
@@ -3218,7 +3778,507 @@
           <a:effectLst/>
         </p:spPr>
         <p:txBody>
-          <a:bodyPr wrap="none" lIns="27432" rIns="27432" tIns="18288" bIns="18288" anchor="ctr">
+          <a:bodyPr wrap="none" lIns="18288" rIns="18288" tIns="18288" bIns="18288" anchor="t">
+            <a:spAutoFit/>
+          </a:bodyPr>
+          <a:lstStyle/>
+          <a:p>
+            <a:pPr algn="ctr">
+              <a:spcAft>
+                <a:spcPts val="0"/>
+              </a:spcAft>
+            </a:pPr>
+            <a:r>
+              <a:rPr sz="1050" b="0" i="0">
+                <a:solidFill>
+                  <a:srgbClr val="B4C7D2"/>
+                </a:solidFill>
+                <a:latin typeface="Arial"/>
+              </a:rPr>
+              <a:t>0.0</a:t>
+            </a:r>
+          </a:p>
+        </p:txBody>
+      </p:sp>
+      <p:cxnSp>
+        <p:nvCxnSpPr>
+          <p:cNvPr id="23" name="C2-E33 line 21" descr="sci-ppt:o021"/>
+          <p:cNvCxnSpPr/>
+          <p:nvPr/>
+        </p:nvCxnSpPr>
+        <p:spPr>
+          <a:xfrm>
+            <a:off x="2571750" y="5394960"/>
+            <a:ext cx="0" cy="64008"/>
+          </a:xfrm>
+          <a:prstGeom prst="line">
+            <a:avLst/>
+          </a:prstGeom>
+          <a:ln w="12700">
+            <a:solidFill>
+              <a:srgbClr val="B4C7D2"/>
+            </a:solidFill>
+          </a:ln>
+          <a:effectLst/>
+        </p:spPr>
+      </p:cxnSp>
+      <p:cxnSp>
+        <p:nvCxnSpPr>
+          <p:cNvPr id="24" name="C2-E33 line 22" descr="sci-ppt:o022"/>
+          <p:cNvCxnSpPr/>
+          <p:nvPr/>
+        </p:nvCxnSpPr>
+        <p:spPr>
+          <a:xfrm>
+            <a:off x="2571750" y="3017520"/>
+            <a:ext cx="0" cy="2377440"/>
+          </a:xfrm>
+          <a:prstGeom prst="line">
+            <a:avLst/>
+          </a:prstGeom>
+          <a:ln w="7620">
+            <a:solidFill>
+              <a:srgbClr val="2E4756"/>
+            </a:solidFill>
+          </a:ln>
+          <a:effectLst/>
+        </p:spPr>
+      </p:cxnSp>
+      <p:sp>
+        <p:nvSpPr>
+          <p:cNvPr id="25" name="C2-E33 text 23" descr="sci-ppt:o023"/>
+          <p:cNvSpPr txBox="1"/>
+          <p:nvPr/>
+        </p:nvSpPr>
+        <p:spPr>
+          <a:xfrm>
+            <a:off x="2114550" y="5477256"/>
+            <a:ext cx="914400" cy="208407"/>
+          </a:xfrm>
+          <a:prstGeom prst="rect">
+            <a:avLst/>
+          </a:prstGeom>
+          <a:noFill/>
+          <a:effectLst/>
+        </p:spPr>
+        <p:txBody>
+          <a:bodyPr wrap="none" lIns="18288" rIns="18288" tIns="18288" bIns="18288" anchor="t">
+            <a:spAutoFit/>
+          </a:bodyPr>
+          <a:lstStyle/>
+          <a:p>
+            <a:pPr algn="ctr">
+              <a:spcAft>
+                <a:spcPts val="0"/>
+              </a:spcAft>
+            </a:pPr>
+            <a:r>
+              <a:rPr sz="1050" b="0" i="0">
+                <a:solidFill>
+                  <a:srgbClr val="B4C7D2"/>
+                </a:solidFill>
+                <a:latin typeface="Arial"/>
+              </a:rPr>
+              <a:t>0.5</a:t>
+            </a:r>
+          </a:p>
+        </p:txBody>
+      </p:sp>
+      <p:cxnSp>
+        <p:nvCxnSpPr>
+          <p:cNvPr id="26" name="C2-E33 line 24" descr="sci-ppt:o024"/>
+          <p:cNvCxnSpPr/>
+          <p:nvPr/>
+        </p:nvCxnSpPr>
+        <p:spPr>
+          <a:xfrm>
+            <a:off x="4229100" y="5394960"/>
+            <a:ext cx="0" cy="64008"/>
+          </a:xfrm>
+          <a:prstGeom prst="line">
+            <a:avLst/>
+          </a:prstGeom>
+          <a:ln w="12700">
+            <a:solidFill>
+              <a:srgbClr val="B4C7D2"/>
+            </a:solidFill>
+          </a:ln>
+          <a:effectLst/>
+        </p:spPr>
+      </p:cxnSp>
+      <p:cxnSp>
+        <p:nvCxnSpPr>
+          <p:cNvPr id="27" name="C2-E33 line 25" descr="sci-ppt:o025"/>
+          <p:cNvCxnSpPr/>
+          <p:nvPr/>
+        </p:nvCxnSpPr>
+        <p:spPr>
+          <a:xfrm>
+            <a:off x="4229100" y="3017520"/>
+            <a:ext cx="0" cy="2377440"/>
+          </a:xfrm>
+          <a:prstGeom prst="line">
+            <a:avLst/>
+          </a:prstGeom>
+          <a:ln w="7620">
+            <a:solidFill>
+              <a:srgbClr val="2E4756"/>
+            </a:solidFill>
+          </a:ln>
+          <a:effectLst/>
+        </p:spPr>
+      </p:cxnSp>
+      <p:sp>
+        <p:nvSpPr>
+          <p:cNvPr id="28" name="C2-E33 text 26" descr="sci-ppt:o026"/>
+          <p:cNvSpPr txBox="1"/>
+          <p:nvPr/>
+        </p:nvSpPr>
+        <p:spPr>
+          <a:xfrm>
+            <a:off x="3771900" y="5477256"/>
+            <a:ext cx="914400" cy="208407"/>
+          </a:xfrm>
+          <a:prstGeom prst="rect">
+            <a:avLst/>
+          </a:prstGeom>
+          <a:noFill/>
+          <a:effectLst/>
+        </p:spPr>
+        <p:txBody>
+          <a:bodyPr wrap="none" lIns="18288" rIns="18288" tIns="18288" bIns="18288" anchor="t">
+            <a:spAutoFit/>
+          </a:bodyPr>
+          <a:lstStyle/>
+          <a:p>
+            <a:pPr algn="ctr">
+              <a:spcAft>
+                <a:spcPts val="0"/>
+              </a:spcAft>
+            </a:pPr>
+            <a:r>
+              <a:rPr sz="1050" b="0" i="0">
+                <a:solidFill>
+                  <a:srgbClr val="B4C7D2"/>
+                </a:solidFill>
+                <a:latin typeface="Arial"/>
+              </a:rPr>
+              <a:t>1.0</a:t>
+            </a:r>
+          </a:p>
+        </p:txBody>
+      </p:sp>
+      <p:cxnSp>
+        <p:nvCxnSpPr>
+          <p:cNvPr id="29" name="C2-E33 line 27" descr="sci-ppt:o027"/>
+          <p:cNvCxnSpPr/>
+          <p:nvPr/>
+        </p:nvCxnSpPr>
+        <p:spPr>
+          <a:xfrm>
+            <a:off x="5886450" y="5394960"/>
+            <a:ext cx="0" cy="64008"/>
+          </a:xfrm>
+          <a:prstGeom prst="line">
+            <a:avLst/>
+          </a:prstGeom>
+          <a:ln w="12700">
+            <a:solidFill>
+              <a:srgbClr val="B4C7D2"/>
+            </a:solidFill>
+          </a:ln>
+          <a:effectLst/>
+        </p:spPr>
+      </p:cxnSp>
+      <p:cxnSp>
+        <p:nvCxnSpPr>
+          <p:cNvPr id="30" name="C2-E33 line 28" descr="sci-ppt:o028"/>
+          <p:cNvCxnSpPr/>
+          <p:nvPr/>
+        </p:nvCxnSpPr>
+        <p:spPr>
+          <a:xfrm>
+            <a:off x="5886450" y="3017520"/>
+            <a:ext cx="0" cy="2377440"/>
+          </a:xfrm>
+          <a:prstGeom prst="line">
+            <a:avLst/>
+          </a:prstGeom>
+          <a:ln w="7620">
+            <a:solidFill>
+              <a:srgbClr val="2E4756"/>
+            </a:solidFill>
+          </a:ln>
+          <a:effectLst/>
+        </p:spPr>
+      </p:cxnSp>
+      <p:sp>
+        <p:nvSpPr>
+          <p:cNvPr id="31" name="C2-E33 text 29" descr="sci-ppt:o029"/>
+          <p:cNvSpPr txBox="1"/>
+          <p:nvPr/>
+        </p:nvSpPr>
+        <p:spPr>
+          <a:xfrm>
+            <a:off x="5429250" y="5477256"/>
+            <a:ext cx="914400" cy="208407"/>
+          </a:xfrm>
+          <a:prstGeom prst="rect">
+            <a:avLst/>
+          </a:prstGeom>
+          <a:noFill/>
+          <a:effectLst/>
+        </p:spPr>
+        <p:txBody>
+          <a:bodyPr wrap="none" lIns="18288" rIns="18288" tIns="18288" bIns="18288" anchor="t">
+            <a:spAutoFit/>
+          </a:bodyPr>
+          <a:lstStyle/>
+          <a:p>
+            <a:pPr algn="ctr">
+              <a:spcAft>
+                <a:spcPts val="0"/>
+              </a:spcAft>
+            </a:pPr>
+            <a:r>
+              <a:rPr sz="1050" b="0" i="0">
+                <a:solidFill>
+                  <a:srgbClr val="B4C7D2"/>
+                </a:solidFill>
+                <a:latin typeface="Arial"/>
+              </a:rPr>
+              <a:t>1.5</a:t>
+            </a:r>
+          </a:p>
+        </p:txBody>
+      </p:sp>
+      <p:cxnSp>
+        <p:nvCxnSpPr>
+          <p:cNvPr id="32" name="C2-E33 line 30" descr="sci-ppt:o030"/>
+          <p:cNvCxnSpPr/>
+          <p:nvPr/>
+        </p:nvCxnSpPr>
+        <p:spPr>
+          <a:xfrm>
+            <a:off x="850392" y="4734560"/>
+            <a:ext cx="64008" cy="0"/>
+          </a:xfrm>
+          <a:prstGeom prst="line">
+            <a:avLst/>
+          </a:prstGeom>
+          <a:ln w="12700">
+            <a:solidFill>
+              <a:srgbClr val="B4C7D2"/>
+            </a:solidFill>
+          </a:ln>
+          <a:effectLst/>
+        </p:spPr>
+      </p:cxnSp>
+      <p:cxnSp>
+        <p:nvCxnSpPr>
+          <p:cNvPr id="33" name="C2-E33 line 31" descr="sci-ppt:o031"/>
+          <p:cNvCxnSpPr/>
+          <p:nvPr/>
+        </p:nvCxnSpPr>
+        <p:spPr>
+          <a:xfrm>
+            <a:off x="914400" y="4734560"/>
+            <a:ext cx="5303520" cy="0"/>
+          </a:xfrm>
+          <a:prstGeom prst="line">
+            <a:avLst/>
+          </a:prstGeom>
+          <a:ln w="7620">
+            <a:solidFill>
+              <a:srgbClr val="2E4756"/>
+            </a:solidFill>
+          </a:ln>
+          <a:effectLst/>
+        </p:spPr>
+      </p:cxnSp>
+      <p:sp>
+        <p:nvSpPr>
+          <p:cNvPr id="34" name="C2-E33 text 32" descr="sci-ppt:o032"/>
+          <p:cNvSpPr txBox="1"/>
+          <p:nvPr/>
+        </p:nvSpPr>
+        <p:spPr>
+          <a:xfrm>
+            <a:off x="45720" y="4652264"/>
+            <a:ext cx="777240" cy="208407"/>
+          </a:xfrm>
+          <a:prstGeom prst="rect">
+            <a:avLst/>
+          </a:prstGeom>
+          <a:noFill/>
+          <a:effectLst/>
+        </p:spPr>
+        <p:txBody>
+          <a:bodyPr wrap="none" lIns="18288" rIns="18288" tIns="18288" bIns="18288" anchor="t">
+            <a:spAutoFit/>
+          </a:bodyPr>
+          <a:lstStyle/>
+          <a:p>
+            <a:pPr algn="r">
+              <a:spcAft>
+                <a:spcPts val="0"/>
+              </a:spcAft>
+            </a:pPr>
+            <a:r>
+              <a:rPr sz="1050" b="0" i="0">
+                <a:solidFill>
+                  <a:srgbClr val="B4C7D2"/>
+                </a:solidFill>
+                <a:latin typeface="Arial"/>
+              </a:rPr>
+              <a:t>0</a:t>
+            </a:r>
+          </a:p>
+        </p:txBody>
+      </p:sp>
+      <p:cxnSp>
+        <p:nvCxnSpPr>
+          <p:cNvPr id="35" name="C2-E33 line 33" descr="sci-ppt:o033"/>
+          <p:cNvCxnSpPr/>
+          <p:nvPr/>
+        </p:nvCxnSpPr>
+        <p:spPr>
+          <a:xfrm>
+            <a:off x="850392" y="3413760"/>
+            <a:ext cx="64008" cy="0"/>
+          </a:xfrm>
+          <a:prstGeom prst="line">
+            <a:avLst/>
+          </a:prstGeom>
+          <a:ln w="12700">
+            <a:solidFill>
+              <a:srgbClr val="B4C7D2"/>
+            </a:solidFill>
+          </a:ln>
+          <a:effectLst/>
+        </p:spPr>
+      </p:cxnSp>
+      <p:cxnSp>
+        <p:nvCxnSpPr>
+          <p:cNvPr id="36" name="C2-E33 line 34" descr="sci-ppt:o034"/>
+          <p:cNvCxnSpPr/>
+          <p:nvPr/>
+        </p:nvCxnSpPr>
+        <p:spPr>
+          <a:xfrm>
+            <a:off x="914400" y="3413760"/>
+            <a:ext cx="5303520" cy="0"/>
+          </a:xfrm>
+          <a:prstGeom prst="line">
+            <a:avLst/>
+          </a:prstGeom>
+          <a:ln w="7620">
+            <a:solidFill>
+              <a:srgbClr val="2E4756"/>
+            </a:solidFill>
+          </a:ln>
+          <a:effectLst/>
+        </p:spPr>
+      </p:cxnSp>
+      <p:sp>
+        <p:nvSpPr>
+          <p:cNvPr id="37" name="C2-E33 text 35" descr="sci-ppt:o035"/>
+          <p:cNvSpPr txBox="1"/>
+          <p:nvPr/>
+        </p:nvSpPr>
+        <p:spPr>
+          <a:xfrm>
+            <a:off x="45720" y="3331464"/>
+            <a:ext cx="777240" cy="208407"/>
+          </a:xfrm>
+          <a:prstGeom prst="rect">
+            <a:avLst/>
+          </a:prstGeom>
+          <a:noFill/>
+          <a:effectLst/>
+        </p:spPr>
+        <p:txBody>
+          <a:bodyPr wrap="none" lIns="18288" rIns="18288" tIns="18288" bIns="18288" anchor="t">
+            <a:spAutoFit/>
+          </a:bodyPr>
+          <a:lstStyle/>
+          <a:p>
+            <a:pPr algn="r">
+              <a:spcAft>
+                <a:spcPts val="0"/>
+              </a:spcAft>
+            </a:pPr>
+            <a:r>
+              <a:rPr sz="1050" b="0" i="0">
+                <a:solidFill>
+                  <a:srgbClr val="B4C7D2"/>
+                </a:solidFill>
+                <a:latin typeface="Arial"/>
+              </a:rPr>
+              <a:t>1</a:t>
+            </a:r>
+          </a:p>
+        </p:txBody>
+      </p:sp>
+      <p:sp>
+        <p:nvSpPr>
+          <p:cNvPr id="38" name="C2-E33 text 36" descr="sci-ppt:o036"/>
+          <p:cNvSpPr txBox="1"/>
+          <p:nvPr/>
+        </p:nvSpPr>
+        <p:spPr>
+          <a:xfrm>
+            <a:off x="914400" y="5678424"/>
+            <a:ext cx="5303520" cy="231648"/>
+          </a:xfrm>
+          <a:prstGeom prst="rect">
+            <a:avLst/>
+          </a:prstGeom>
+          <a:noFill/>
+          <a:effectLst/>
+        </p:spPr>
+        <p:txBody>
+          <a:bodyPr wrap="none" lIns="18288" rIns="18288" tIns="18288" bIns="18288" anchor="t">
+            <a:spAutoFit/>
+          </a:bodyPr>
+          <a:lstStyle/>
+          <a:p>
+            <a:pPr algn="ctr">
+              <a:spcAft>
+                <a:spcPts val="0"/>
+              </a:spcAft>
+            </a:pPr>
+            <a:r>
+              <a:rPr sz="1200" b="0" i="0">
+                <a:solidFill>
+                  <a:srgbClr val="E7F0F3"/>
+                </a:solidFill>
+                <a:latin typeface="Arial"/>
+              </a:rPr>
+              <a:t>rₙ / r*</a:t>
+            </a:r>
+          </a:p>
+        </p:txBody>
+      </p:sp>
+      <p:sp>
+        <p:nvSpPr>
+          <p:cNvPr id="39" name="C2-E33 text 37" descr="sci-ppt:o037"/>
+          <p:cNvSpPr txBox="1"/>
+          <p:nvPr/>
+        </p:nvSpPr>
+        <p:spPr>
+          <a:xfrm>
+            <a:off x="365760" y="2670048"/>
+            <a:ext cx="5303520" cy="231648"/>
+          </a:xfrm>
+          <a:prstGeom prst="rect">
+            <a:avLst/>
+          </a:prstGeom>
+          <a:noFill/>
+          <a:effectLst/>
+        </p:spPr>
+        <p:txBody>
+          <a:bodyPr wrap="none" lIns="18288" rIns="18288" tIns="18288" bIns="18288" anchor="t">
             <a:spAutoFit/>
           </a:bodyPr>
           <a:lstStyle/>
@@ -3229,27 +4289,694 @@
               </a:spcAft>
             </a:pPr>
             <a:r>
-              <a:rPr sz="1823" b="0" i="0">
+              <a:rPr sz="1200" b="0" i="0">
                 <a:solidFill>
                   <a:srgbClr val="E7F0F3"/>
                 </a:solidFill>
                 <a:latin typeface="Arial"/>
               </a:rPr>
-              <a:t>Finite PFC liquid: p_d</a:t>
-            </a:r>
-          </a:p>
-        </p:txBody>
-      </p:sp>
-      <p:sp>
-        <p:nvSpPr>
-          <p:cNvPr id="6" name="text5" descr="sci-ppt:C2-E33-005"/>
+              <a:t>W / W*</a:t>
+            </a:r>
+          </a:p>
+        </p:txBody>
+      </p:sp>
+      <p:sp>
+        <p:nvSpPr>
+          <p:cNvPr id="40" name="C2-E33 polygon 38" descr="sci-ppt:o038"/>
+          <p:cNvSpPr/>
+          <p:nvPr/>
+        </p:nvSpPr>
+        <p:spPr>
+          <a:xfrm>
+            <a:off x="914400" y="3413795"/>
+            <a:ext cx="5276869" cy="1936408"/>
+          </a:xfrm>
+          <a:custGeom>
+            <a:avLst/>
+            <a:gdLst/>
+            <a:ahLst/>
+            <a:cxnLst/>
+            <a:rect l="l" t="t" r="r" b="b"/>
+            <a:pathLst>
+              <a:path w="5276869" h="1936408">
+                <a:moveTo>
+                  <a:pt x="0" y="1320765"/>
+                </a:moveTo>
+                <a:lnTo>
+                  <a:pt x="26650" y="1320510"/>
+                </a:lnTo>
+                <a:lnTo>
+                  <a:pt x="53301" y="1319751"/>
+                </a:lnTo>
+                <a:lnTo>
+                  <a:pt x="79952" y="1318496"/>
+                </a:lnTo>
+                <a:lnTo>
+                  <a:pt x="106603" y="1316754"/>
+                </a:lnTo>
+                <a:lnTo>
+                  <a:pt x="133254" y="1314532"/>
+                </a:lnTo>
+                <a:lnTo>
+                  <a:pt x="159905" y="1311840"/>
+                </a:lnTo>
+                <a:lnTo>
+                  <a:pt x="186555" y="1308684"/>
+                </a:lnTo>
+                <a:lnTo>
+                  <a:pt x="213206" y="1305074"/>
+                </a:lnTo>
+                <a:lnTo>
+                  <a:pt x="239857" y="1301017"/>
+                </a:lnTo>
+                <a:lnTo>
+                  <a:pt x="266508" y="1296523"/>
+                </a:lnTo>
+                <a:lnTo>
+                  <a:pt x="293159" y="1291598"/>
+                </a:lnTo>
+                <a:lnTo>
+                  <a:pt x="319810" y="1286252"/>
+                </a:lnTo>
+                <a:lnTo>
+                  <a:pt x="346461" y="1280492"/>
+                </a:lnTo>
+                <a:lnTo>
+                  <a:pt x="373111" y="1274327"/>
+                </a:lnTo>
+                <a:lnTo>
+                  <a:pt x="399762" y="1267765"/>
+                </a:lnTo>
+                <a:lnTo>
+                  <a:pt x="426413" y="1260814"/>
+                </a:lnTo>
+                <a:lnTo>
+                  <a:pt x="453064" y="1253483"/>
+                </a:lnTo>
+                <a:lnTo>
+                  <a:pt x="479715" y="1245780"/>
+                </a:lnTo>
+                <a:lnTo>
+                  <a:pt x="506366" y="1237712"/>
+                </a:lnTo>
+                <a:lnTo>
+                  <a:pt x="533017" y="1229289"/>
+                </a:lnTo>
+                <a:lnTo>
+                  <a:pt x="559667" y="1220518"/>
+                </a:lnTo>
+                <a:lnTo>
+                  <a:pt x="586318" y="1211408"/>
+                </a:lnTo>
+                <a:lnTo>
+                  <a:pt x="612969" y="1201967"/>
+                </a:lnTo>
+                <a:lnTo>
+                  <a:pt x="639620" y="1192203"/>
+                </a:lnTo>
+                <a:lnTo>
+                  <a:pt x="666271" y="1182125"/>
+                </a:lnTo>
+                <a:lnTo>
+                  <a:pt x="692922" y="1171740"/>
+                </a:lnTo>
+                <a:lnTo>
+                  <a:pt x="719573" y="1161057"/>
+                </a:lnTo>
+                <a:lnTo>
+                  <a:pt x="746223" y="1150084"/>
+                </a:lnTo>
+                <a:lnTo>
+                  <a:pt x="772874" y="1138829"/>
+                </a:lnTo>
+                <a:lnTo>
+                  <a:pt x="799525" y="1127301"/>
+                </a:lnTo>
+                <a:lnTo>
+                  <a:pt x="826176" y="1115508"/>
+                </a:lnTo>
+                <a:lnTo>
+                  <a:pt x="852827" y="1103458"/>
+                </a:lnTo>
+                <a:lnTo>
+                  <a:pt x="879478" y="1091160"/>
+                </a:lnTo>
+                <a:lnTo>
+                  <a:pt x="906129" y="1078621"/>
+                </a:lnTo>
+                <a:lnTo>
+                  <a:pt x="932779" y="1065849"/>
+                </a:lnTo>
+                <a:lnTo>
+                  <a:pt x="959430" y="1052854"/>
+                </a:lnTo>
+                <a:lnTo>
+                  <a:pt x="986081" y="1039643"/>
+                </a:lnTo>
+                <a:lnTo>
+                  <a:pt x="1012732" y="1026225"/>
+                </a:lnTo>
+                <a:lnTo>
+                  <a:pt x="1039383" y="1012607"/>
+                </a:lnTo>
+                <a:lnTo>
+                  <a:pt x="1066034" y="998798"/>
+                </a:lnTo>
+                <a:lnTo>
+                  <a:pt x="1092685" y="984806"/>
+                </a:lnTo>
+                <a:lnTo>
+                  <a:pt x="1119335" y="970640"/>
+                </a:lnTo>
+                <a:lnTo>
+                  <a:pt x="1145986" y="956308"/>
+                </a:lnTo>
+                <a:lnTo>
+                  <a:pt x="1172637" y="941818"/>
+                </a:lnTo>
+                <a:lnTo>
+                  <a:pt x="1199288" y="927177"/>
+                </a:lnTo>
+                <a:lnTo>
+                  <a:pt x="1225939" y="912395"/>
+                </a:lnTo>
+                <a:lnTo>
+                  <a:pt x="1252590" y="897480"/>
+                </a:lnTo>
+                <a:lnTo>
+                  <a:pt x="1279241" y="882440"/>
+                </a:lnTo>
+                <a:lnTo>
+                  <a:pt x="1305891" y="867283"/>
+                </a:lnTo>
+                <a:lnTo>
+                  <a:pt x="1332542" y="852017"/>
+                </a:lnTo>
+                <a:lnTo>
+                  <a:pt x="1359193" y="836650"/>
+                </a:lnTo>
+                <a:lnTo>
+                  <a:pt x="1385844" y="821192"/>
+                </a:lnTo>
+                <a:lnTo>
+                  <a:pt x="1412495" y="805650"/>
+                </a:lnTo>
+                <a:lnTo>
+                  <a:pt x="1439146" y="790032"/>
+                </a:lnTo>
+                <a:lnTo>
+                  <a:pt x="1465796" y="774346"/>
+                </a:lnTo>
+                <a:lnTo>
+                  <a:pt x="1492447" y="758601"/>
+                </a:lnTo>
+                <a:lnTo>
+                  <a:pt x="1519098" y="742806"/>
+                </a:lnTo>
+                <a:lnTo>
+                  <a:pt x="1545749" y="726967"/>
+                </a:lnTo>
+                <a:lnTo>
+                  <a:pt x="1572400" y="711095"/>
+                </a:lnTo>
+                <a:lnTo>
+                  <a:pt x="1599051" y="695195"/>
+                </a:lnTo>
+                <a:lnTo>
+                  <a:pt x="1625702" y="679278"/>
+                </a:lnTo>
+                <a:lnTo>
+                  <a:pt x="1652352" y="663351"/>
+                </a:lnTo>
+                <a:lnTo>
+                  <a:pt x="1679003" y="647423"/>
+                </a:lnTo>
+                <a:lnTo>
+                  <a:pt x="1705654" y="631501"/>
+                </a:lnTo>
+                <a:lnTo>
+                  <a:pt x="1732305" y="615594"/>
+                </a:lnTo>
+                <a:lnTo>
+                  <a:pt x="1758956" y="599710"/>
+                </a:lnTo>
+                <a:lnTo>
+                  <a:pt x="1785607" y="583858"/>
+                </a:lnTo>
+                <a:lnTo>
+                  <a:pt x="1812258" y="568045"/>
+                </a:lnTo>
+                <a:lnTo>
+                  <a:pt x="1838908" y="552281"/>
+                </a:lnTo>
+                <a:lnTo>
+                  <a:pt x="1865559" y="536572"/>
+                </a:lnTo>
+                <a:lnTo>
+                  <a:pt x="1892210" y="520928"/>
+                </a:lnTo>
+                <a:lnTo>
+                  <a:pt x="1918861" y="505356"/>
+                </a:lnTo>
+                <a:lnTo>
+                  <a:pt x="1945512" y="489865"/>
+                </a:lnTo>
+                <a:lnTo>
+                  <a:pt x="1972163" y="474463"/>
+                </a:lnTo>
+                <a:lnTo>
+                  <a:pt x="1998814" y="459159"/>
+                </a:lnTo>
+                <a:lnTo>
+                  <a:pt x="2025464" y="443960"/>
+                </a:lnTo>
+                <a:lnTo>
+                  <a:pt x="2052115" y="428875"/>
+                </a:lnTo>
+                <a:lnTo>
+                  <a:pt x="2078766" y="413912"/>
+                </a:lnTo>
+                <a:lnTo>
+                  <a:pt x="2105417" y="399079"/>
+                </a:lnTo>
+                <a:lnTo>
+                  <a:pt x="2132068" y="384384"/>
+                </a:lnTo>
+                <a:lnTo>
+                  <a:pt x="2158719" y="369837"/>
+                </a:lnTo>
+                <a:lnTo>
+                  <a:pt x="2185370" y="355444"/>
+                </a:lnTo>
+                <a:lnTo>
+                  <a:pt x="2212020" y="341215"/>
+                </a:lnTo>
+                <a:lnTo>
+                  <a:pt x="2238671" y="327157"/>
+                </a:lnTo>
+                <a:lnTo>
+                  <a:pt x="2265322" y="313279"/>
+                </a:lnTo>
+                <a:lnTo>
+                  <a:pt x="2291973" y="299588"/>
+                </a:lnTo>
+                <a:lnTo>
+                  <a:pt x="2318624" y="286094"/>
+                </a:lnTo>
+                <a:lnTo>
+                  <a:pt x="2345275" y="272804"/>
+                </a:lnTo>
+                <a:lnTo>
+                  <a:pt x="2371926" y="259727"/>
+                </a:lnTo>
+                <a:lnTo>
+                  <a:pt x="2398576" y="246871"/>
+                </a:lnTo>
+                <a:lnTo>
+                  <a:pt x="2425227" y="234244"/>
+                </a:lnTo>
+                <a:lnTo>
+                  <a:pt x="2451878" y="221854"/>
+                </a:lnTo>
+                <a:lnTo>
+                  <a:pt x="2478529" y="209710"/>
+                </a:lnTo>
+                <a:lnTo>
+                  <a:pt x="2505180" y="197819"/>
+                </a:lnTo>
+                <a:lnTo>
+                  <a:pt x="2531831" y="186191"/>
+                </a:lnTo>
+                <a:lnTo>
+                  <a:pt x="2558482" y="174833"/>
+                </a:lnTo>
+                <a:lnTo>
+                  <a:pt x="2585132" y="163754"/>
+                </a:lnTo>
+                <a:lnTo>
+                  <a:pt x="2611783" y="152961"/>
+                </a:lnTo>
+                <a:lnTo>
+                  <a:pt x="2638434" y="142463"/>
+                </a:lnTo>
+                <a:lnTo>
+                  <a:pt x="2665085" y="132269"/>
+                </a:lnTo>
+                <a:lnTo>
+                  <a:pt x="2691736" y="122386"/>
+                </a:lnTo>
+                <a:lnTo>
+                  <a:pt x="2718387" y="112823"/>
+                </a:lnTo>
+                <a:lnTo>
+                  <a:pt x="2745037" y="103588"/>
+                </a:lnTo>
+                <a:lnTo>
+                  <a:pt x="2771688" y="94689"/>
+                </a:lnTo>
+                <a:lnTo>
+                  <a:pt x="2798339" y="86134"/>
+                </a:lnTo>
+                <a:lnTo>
+                  <a:pt x="2824990" y="77932"/>
+                </a:lnTo>
+                <a:lnTo>
+                  <a:pt x="2851641" y="70092"/>
+                </a:lnTo>
+                <a:lnTo>
+                  <a:pt x="2878292" y="62620"/>
+                </a:lnTo>
+                <a:lnTo>
+                  <a:pt x="2904943" y="55526"/>
+                </a:lnTo>
+                <a:lnTo>
+                  <a:pt x="2931593" y="48817"/>
+                </a:lnTo>
+                <a:lnTo>
+                  <a:pt x="2958244" y="42502"/>
+                </a:lnTo>
+                <a:lnTo>
+                  <a:pt x="2984895" y="36589"/>
+                </a:lnTo>
+                <a:lnTo>
+                  <a:pt x="3011546" y="31087"/>
+                </a:lnTo>
+                <a:lnTo>
+                  <a:pt x="3038197" y="26003"/>
+                </a:lnTo>
+                <a:lnTo>
+                  <a:pt x="3064848" y="21346"/>
+                </a:lnTo>
+                <a:lnTo>
+                  <a:pt x="3091499" y="17124"/>
+                </a:lnTo>
+                <a:lnTo>
+                  <a:pt x="3118149" y="13346"/>
+                </a:lnTo>
+                <a:lnTo>
+                  <a:pt x="3144800" y="10019"/>
+                </a:lnTo>
+                <a:lnTo>
+                  <a:pt x="3171451" y="7152"/>
+                </a:lnTo>
+                <a:lnTo>
+                  <a:pt x="3198102" y="4752"/>
+                </a:lnTo>
+                <a:lnTo>
+                  <a:pt x="3224753" y="2829"/>
+                </a:lnTo>
+                <a:lnTo>
+                  <a:pt x="3251404" y="1391"/>
+                </a:lnTo>
+                <a:lnTo>
+                  <a:pt x="3278055" y="445"/>
+                </a:lnTo>
+                <a:lnTo>
+                  <a:pt x="3304705" y="0"/>
+                </a:lnTo>
+                <a:lnTo>
+                  <a:pt x="3331356" y="65"/>
+                </a:lnTo>
+                <a:lnTo>
+                  <a:pt x="3358007" y="647"/>
+                </a:lnTo>
+                <a:lnTo>
+                  <a:pt x="3384658" y="1754"/>
+                </a:lnTo>
+                <a:lnTo>
+                  <a:pt x="3411309" y="3396"/>
+                </a:lnTo>
+                <a:lnTo>
+                  <a:pt x="3437960" y="5580"/>
+                </a:lnTo>
+                <a:lnTo>
+                  <a:pt x="3464611" y="8314"/>
+                </a:lnTo>
+                <a:lnTo>
+                  <a:pt x="3491261" y="11606"/>
+                </a:lnTo>
+                <a:lnTo>
+                  <a:pt x="3517912" y="15466"/>
+                </a:lnTo>
+                <a:lnTo>
+                  <a:pt x="3544563" y="19900"/>
+                </a:lnTo>
+                <a:lnTo>
+                  <a:pt x="3571214" y="24919"/>
+                </a:lnTo>
+                <a:lnTo>
+                  <a:pt x="3597865" y="30528"/>
+                </a:lnTo>
+                <a:lnTo>
+                  <a:pt x="3624516" y="36738"/>
+                </a:lnTo>
+                <a:lnTo>
+                  <a:pt x="3651167" y="43555"/>
+                </a:lnTo>
+                <a:lnTo>
+                  <a:pt x="3677817" y="50989"/>
+                </a:lnTo>
+                <a:lnTo>
+                  <a:pt x="3704468" y="59047"/>
+                </a:lnTo>
+                <a:lnTo>
+                  <a:pt x="3731119" y="67738"/>
+                </a:lnTo>
+                <a:lnTo>
+                  <a:pt x="3757770" y="77070"/>
+                </a:lnTo>
+                <a:lnTo>
+                  <a:pt x="3784421" y="87052"/>
+                </a:lnTo>
+                <a:lnTo>
+                  <a:pt x="3811072" y="97691"/>
+                </a:lnTo>
+                <a:lnTo>
+                  <a:pt x="3837723" y="108995"/>
+                </a:lnTo>
+                <a:lnTo>
+                  <a:pt x="3864373" y="120974"/>
+                </a:lnTo>
+                <a:lnTo>
+                  <a:pt x="3891024" y="133635"/>
+                </a:lnTo>
+                <a:lnTo>
+                  <a:pt x="3917675" y="146986"/>
+                </a:lnTo>
+                <a:lnTo>
+                  <a:pt x="3944326" y="161036"/>
+                </a:lnTo>
+                <a:lnTo>
+                  <a:pt x="3970977" y="175793"/>
+                </a:lnTo>
+                <a:lnTo>
+                  <a:pt x="3997628" y="191265"/>
+                </a:lnTo>
+                <a:lnTo>
+                  <a:pt x="4024278" y="207460"/>
+                </a:lnTo>
+                <a:lnTo>
+                  <a:pt x="4050929" y="224387"/>
+                </a:lnTo>
+                <a:lnTo>
+                  <a:pt x="4077580" y="242054"/>
+                </a:lnTo>
+                <a:lnTo>
+                  <a:pt x="4104231" y="260469"/>
+                </a:lnTo>
+                <a:lnTo>
+                  <a:pt x="4130882" y="279640"/>
+                </a:lnTo>
+                <a:lnTo>
+                  <a:pt x="4157533" y="299576"/>
+                </a:lnTo>
+                <a:lnTo>
+                  <a:pt x="4184184" y="320285"/>
+                </a:lnTo>
+                <a:lnTo>
+                  <a:pt x="4210834" y="341775"/>
+                </a:lnTo>
+                <a:lnTo>
+                  <a:pt x="4237485" y="364054"/>
+                </a:lnTo>
+                <a:lnTo>
+                  <a:pt x="4264136" y="387130"/>
+                </a:lnTo>
+                <a:lnTo>
+                  <a:pt x="4290787" y="411013"/>
+                </a:lnTo>
+                <a:lnTo>
+                  <a:pt x="4317438" y="435709"/>
+                </a:lnTo>
+                <a:lnTo>
+                  <a:pt x="4344089" y="461228"/>
+                </a:lnTo>
+                <a:lnTo>
+                  <a:pt x="4370740" y="487577"/>
+                </a:lnTo>
+                <a:lnTo>
+                  <a:pt x="4397390" y="514765"/>
+                </a:lnTo>
+                <a:lnTo>
+                  <a:pt x="4424041" y="542800"/>
+                </a:lnTo>
+                <a:lnTo>
+                  <a:pt x="4450692" y="571690"/>
+                </a:lnTo>
+                <a:lnTo>
+                  <a:pt x="4477343" y="601443"/>
+                </a:lnTo>
+                <a:lnTo>
+                  <a:pt x="4503994" y="632069"/>
+                </a:lnTo>
+                <a:lnTo>
+                  <a:pt x="4530645" y="663574"/>
+                </a:lnTo>
+                <a:lnTo>
+                  <a:pt x="4557296" y="695967"/>
+                </a:lnTo>
+                <a:lnTo>
+                  <a:pt x="4583946" y="729257"/>
+                </a:lnTo>
+                <a:lnTo>
+                  <a:pt x="4610597" y="763451"/>
+                </a:lnTo>
+                <a:lnTo>
+                  <a:pt x="4637248" y="798558"/>
+                </a:lnTo>
+                <a:lnTo>
+                  <a:pt x="4663899" y="834586"/>
+                </a:lnTo>
+                <a:lnTo>
+                  <a:pt x="4690550" y="871544"/>
+                </a:lnTo>
+                <a:lnTo>
+                  <a:pt x="4717201" y="909439"/>
+                </a:lnTo>
+                <a:lnTo>
+                  <a:pt x="4743852" y="948280"/>
+                </a:lnTo>
+                <a:lnTo>
+                  <a:pt x="4770502" y="988075"/>
+                </a:lnTo>
+                <a:lnTo>
+                  <a:pt x="4797153" y="1028832"/>
+                </a:lnTo>
+                <a:lnTo>
+                  <a:pt x="4823804" y="1070560"/>
+                </a:lnTo>
+                <a:lnTo>
+                  <a:pt x="4850455" y="1113267"/>
+                </a:lnTo>
+                <a:lnTo>
+                  <a:pt x="4877106" y="1156960"/>
+                </a:lnTo>
+                <a:lnTo>
+                  <a:pt x="4903757" y="1201649"/>
+                </a:lnTo>
+                <a:lnTo>
+                  <a:pt x="4930408" y="1247342"/>
+                </a:lnTo>
+                <a:lnTo>
+                  <a:pt x="4957058" y="1294046"/>
+                </a:lnTo>
+                <a:lnTo>
+                  <a:pt x="4983709" y="1341770"/>
+                </a:lnTo>
+                <a:lnTo>
+                  <a:pt x="5010360" y="1390522"/>
+                </a:lnTo>
+                <a:lnTo>
+                  <a:pt x="5037011" y="1440311"/>
+                </a:lnTo>
+                <a:lnTo>
+                  <a:pt x="5063662" y="1491144"/>
+                </a:lnTo>
+                <a:lnTo>
+                  <a:pt x="5090313" y="1543030"/>
+                </a:lnTo>
+                <a:lnTo>
+                  <a:pt x="5116964" y="1595978"/>
+                </a:lnTo>
+                <a:lnTo>
+                  <a:pt x="5143614" y="1649995"/>
+                </a:lnTo>
+                <a:lnTo>
+                  <a:pt x="5170265" y="1705089"/>
+                </a:lnTo>
+                <a:lnTo>
+                  <a:pt x="5196916" y="1761269"/>
+                </a:lnTo>
+                <a:lnTo>
+                  <a:pt x="5223567" y="1818544"/>
+                </a:lnTo>
+                <a:lnTo>
+                  <a:pt x="5250218" y="1876921"/>
+                </a:lnTo>
+                <a:lnTo>
+                  <a:pt x="5276869" y="1936408"/>
+                </a:lnTo>
+              </a:path>
+            </a:pathLst>
+          </a:custGeom>
+          <a:noFill/>
+          <a:ln w="38100">
+            <a:solidFill>
+              <a:srgbClr val="8EDBD4"/>
+            </a:solidFill>
+          </a:ln>
+          <a:effectLst/>
+        </p:spPr>
+        <p:txBody>
+          <a:bodyPr rtlCol="0" anchor="ctr"/>
+          <a:lstStyle/>
+          <a:p>
+            <a:pPr algn="ctr"/>
+          </a:p>
+        </p:txBody>
+      </p:sp>
+      <p:sp>
+        <p:nvSpPr>
+          <p:cNvPr id="41" name="C2-E33 ellipse 39" descr="sci-ppt:o039"/>
+          <p:cNvSpPr/>
+          <p:nvPr/>
+        </p:nvSpPr>
+        <p:spPr>
+          <a:xfrm>
+            <a:off x="4155948" y="3340608"/>
+            <a:ext cx="146304" cy="146304"/>
+          </a:xfrm>
+          <a:prstGeom prst="ellipse">
+            <a:avLst/>
+          </a:prstGeom>
+          <a:solidFill>
+            <a:srgbClr val="F2B880"/>
+          </a:solidFill>
+          <a:ln w="12700">
+            <a:solidFill>
+              <a:srgbClr val="F2B880"/>
+            </a:solidFill>
+          </a:ln>
+          <a:effectLst/>
+        </p:spPr>
+        <p:txBody>
+          <a:bodyPr rtlCol="0" anchor="ctr"/>
+          <a:lstStyle/>
+          <a:p>
+            <a:pPr algn="ctr"/>
+          </a:p>
+        </p:txBody>
+      </p:sp>
+      <p:sp>
+        <p:nvSpPr>
+          <p:cNvPr id="42" name="C2-E33 text 40" descr="sci-ppt:o040"/>
           <p:cNvSpPr txBox="1"/>
           <p:nvPr/>
         </p:nvSpPr>
         <p:spPr>
           <a:xfrm>
-            <a:off x="1341120" y="4267200"/>
-            <a:ext cx="5608320" cy="321259"/>
+            <a:off x="4320540" y="3048000"/>
+            <a:ext cx="1097280" cy="239395"/>
           </a:xfrm>
           <a:prstGeom prst="rect">
             <a:avLst/>
@@ -3258,7 +4985,7 @@
           <a:effectLst/>
         </p:spPr>
         <p:txBody>
-          <a:bodyPr wrap="none" lIns="27432" rIns="27432" tIns="18288" bIns="18288" anchor="ctr">
+          <a:bodyPr wrap="none" lIns="18288" rIns="18288" tIns="18288" bIns="18288" anchor="t">
             <a:spAutoFit/>
           </a:bodyPr>
           <a:lstStyle/>
@@ -3269,75 +4996,187 @@
               </a:spcAft>
             </a:pPr>
             <a:r>
-              <a:rPr sz="1632" b="0" i="0">
+              <a:rPr sz="1250" b="0" i="0">
+                <a:solidFill>
+                  <a:srgbClr val="F2B880"/>
+                </a:solidFill>
+                <a:latin typeface="Arial"/>
+              </a:rPr>
+              <a:t>r*, W*</a:t>
+            </a:r>
+          </a:p>
+        </p:txBody>
+      </p:sp>
+      <p:sp>
+        <p:nvSpPr>
+          <p:cNvPr id="43" name="C2-E33 round_rect 41" descr="sci-ppt:o041"/>
+          <p:cNvSpPr/>
+          <p:nvPr/>
+        </p:nvSpPr>
+        <p:spPr>
+          <a:xfrm>
+            <a:off x="6583680" y="3017520"/>
+            <a:ext cx="5212080" cy="2651760"/>
+          </a:xfrm>
+          <a:prstGeom prst="roundRect">
+            <a:avLst/>
+          </a:prstGeom>
+          <a:solidFill>
+            <a:srgbClr val="213E4B"/>
+          </a:solidFill>
+          <a:ln w="20320">
+            <a:solidFill>
+              <a:srgbClr val="8EDBD4"/>
+            </a:solidFill>
+          </a:ln>
+          <a:effectLst/>
+        </p:spPr>
+        <p:txBody>
+          <a:bodyPr rtlCol="0" anchor="ctr"/>
+          <a:lstStyle/>
+          <a:p>
+            <a:pPr algn="ctr"/>
+          </a:p>
+        </p:txBody>
+      </p:sp>
+      <p:sp>
+        <p:nvSpPr>
+          <p:cNvPr id="44" name="C2-E33 text 42" descr="sci-ppt:o042"/>
+          <p:cNvSpPr txBox="1"/>
+          <p:nvPr/>
+        </p:nvSpPr>
+        <p:spPr>
+          <a:xfrm>
+            <a:off x="6693408" y="3072384"/>
+            <a:ext cx="4992624" cy="247142"/>
+          </a:xfrm>
+          <a:prstGeom prst="rect">
+            <a:avLst/>
+          </a:prstGeom>
+          <a:noFill/>
+          <a:effectLst/>
+        </p:spPr>
+        <p:txBody>
+          <a:bodyPr wrap="none" lIns="18288" rIns="18288" tIns="18288" bIns="18288" anchor="t">
+            <a:spAutoFit/>
+          </a:bodyPr>
+          <a:lstStyle/>
+          <a:p>
+            <a:pPr algn="l">
+              <a:spcAft>
+                <a:spcPts val="0"/>
+              </a:spcAft>
+            </a:pPr>
+            <a:r>
+              <a:rPr sz="1300" b="1" i="0">
+                <a:solidFill>
+                  <a:srgbClr val="8EDBD4"/>
+                </a:solidFill>
+                <a:latin typeface="Arial"/>
+              </a:rPr>
+              <a:t>Read it from left to right</a:t>
+            </a:r>
+          </a:p>
+        </p:txBody>
+      </p:sp>
+      <p:sp>
+        <p:nvSpPr>
+          <p:cNvPr id="45" name="C2-E33 text 43" descr="sci-ppt:o043"/>
+          <p:cNvSpPr txBox="1"/>
+          <p:nvPr/>
+        </p:nvSpPr>
+        <p:spPr>
+          <a:xfrm>
+            <a:off x="6922007" y="3474720"/>
+            <a:ext cx="4736592" cy="417576"/>
+          </a:xfrm>
+          <a:prstGeom prst="rect">
+            <a:avLst/>
+          </a:prstGeom>
+          <a:noFill/>
+          <a:effectLst/>
+        </p:spPr>
+        <p:txBody>
+          <a:bodyPr wrap="none" lIns="18288" rIns="18288" tIns="18288" bIns="18288" anchor="t">
+            <a:spAutoFit/>
+          </a:bodyPr>
+          <a:lstStyle/>
+          <a:p>
+            <a:pPr algn="l">
+              <a:spcAft>
+                <a:spcPts val="0"/>
+              </a:spcAft>
+            </a:pPr>
+            <a:r>
+              <a:rPr sz="1200" b="0" i="0">
                 <a:solidFill>
                   <a:srgbClr val="E7F0F3"/>
                 </a:solidFill>
                 <a:latin typeface="Arial"/>
               </a:rPr>
-              <a:t>Inner interface σ_vp; outer σ_pc</a:t>
-            </a:r>
-          </a:p>
-        </p:txBody>
-      </p:sp>
-      <p:cxnSp>
-        <p:nvCxnSpPr>
-          <p:cNvPr id="7" name="arrow6" descr="sci-ppt:C2-E33-006"/>
-          <p:cNvCxnSpPr/>
+              <a:t>Confinement sets the liquid pressure p_d; a smaller core</a:t>
+            </a:r>
+          </a:p>
+          <a:p>
+            <a:pPr algn="l">
+              <a:spcAft>
+                <a:spcPts val="0"/>
+              </a:spcAft>
+            </a:pPr>
+            <a:r>
+              <a:rPr sz="1200" b="0" i="0">
+                <a:solidFill>
+                  <a:srgbClr val="E7F0F3"/>
+                </a:solidFill>
+                <a:latin typeface="Arial"/>
+              </a:rPr>
+              <a:t>raises it.</a:t>
+            </a:r>
+          </a:p>
+        </p:txBody>
+      </p:sp>
+      <p:sp>
+        <p:nvSpPr>
+          <p:cNvPr id="46" name="C2-E33 ellipse 44" descr="sci-ppt:o044"/>
+          <p:cNvSpPr/>
           <p:nvPr/>
-        </p:nvCxnSpPr>
-        <p:spPr>
-          <a:xfrm>
-            <a:off x="6705600" y="3901440"/>
-            <a:ext cx="4267200" cy="0"/>
-          </a:xfrm>
-          <a:prstGeom prst="line">
+        </p:nvSpPr>
+        <p:spPr>
+          <a:xfrm>
+            <a:off x="6752844" y="3528060"/>
+            <a:ext cx="82296" cy="82296"/>
+          </a:xfrm>
+          <a:prstGeom prst="ellipse">
             <a:avLst/>
           </a:prstGeom>
-          <a:ln w="25400">
+          <a:solidFill>
+            <a:srgbClr val="8EDBD4"/>
+          </a:solidFill>
+          <a:ln w="12700">
             <a:solidFill>
               <a:srgbClr val="8EDBD4"/>
             </a:solidFill>
-            <a:headEnd type="none" w="med" len="med"/>
-            <a:tailEnd type="triangle" w="med" len="med"/>
           </a:ln>
           <a:effectLst/>
         </p:spPr>
-      </p:cxnSp>
-      <p:cxnSp>
-        <p:nvCxnSpPr>
-          <p:cNvPr id="8" name="arrow7" descr="sci-ppt:C2-E33-007"/>
-          <p:cNvCxnSpPr/>
-          <p:nvPr/>
-        </p:nvCxnSpPr>
-        <p:spPr>
-          <a:xfrm flipV="1">
-            <a:off x="6705600" y="1463040"/>
-            <a:ext cx="0" cy="2438400"/>
-          </a:xfrm>
-          <a:prstGeom prst="line">
-            <a:avLst/>
-          </a:prstGeom>
-          <a:ln w="25400">
-            <a:solidFill>
-              <a:srgbClr val="8EDBD4"/>
-            </a:solidFill>
-            <a:headEnd type="none" w="med" len="med"/>
-            <a:tailEnd type="triangle" w="med" len="med"/>
-          </a:ln>
-          <a:effectLst/>
-        </p:spPr>
-      </p:cxnSp>
-      <p:sp>
-        <p:nvSpPr>
-          <p:cNvPr id="9" name="text8" descr="sci-ppt:C2-E33-008"/>
+        <p:txBody>
+          <a:bodyPr rtlCol="0" anchor="ctr"/>
+          <a:lstStyle/>
+          <a:p>
+            <a:pPr algn="ctr"/>
+          </a:p>
+        </p:txBody>
+      </p:sp>
+      <p:sp>
+        <p:nvSpPr>
+          <p:cNvPr id="47" name="C2-E33 text 45" descr="sci-ppt:o045"/>
           <p:cNvSpPr txBox="1"/>
           <p:nvPr/>
         </p:nvSpPr>
         <p:spPr>
           <a:xfrm>
-            <a:off x="9997440" y="4023360"/>
-            <a:ext cx="1828800" cy="321259"/>
+            <a:off x="6922007" y="3938016"/>
+            <a:ext cx="4736592" cy="417576"/>
           </a:xfrm>
           <a:prstGeom prst="rect">
             <a:avLst/>
@@ -3346,7 +5185,7 @@
           <a:effectLst/>
         </p:spPr>
         <p:txBody>
-          <a:bodyPr wrap="none" lIns="27432" rIns="27432" tIns="18288" bIns="18288" anchor="ctr">
+          <a:bodyPr wrap="none" lIns="18288" rIns="18288" tIns="18288" bIns="18288" anchor="t">
             <a:spAutoFit/>
           </a:bodyPr>
           <a:lstStyle/>
@@ -3357,27 +5196,75 @@
               </a:spcAft>
             </a:pPr>
             <a:r>
-              <a:rPr sz="1632" b="0" i="0">
+              <a:rPr sz="1200" b="0" i="0">
                 <a:solidFill>
                   <a:srgbClr val="E7F0F3"/>
                 </a:solidFill>
                 <a:latin typeface="Arial"/>
               </a:rPr>
-              <a:t>r_n</a:t>
-            </a:r>
-          </a:p>
-        </p:txBody>
-      </p:sp>
-      <p:sp>
-        <p:nvSpPr>
-          <p:cNvPr id="10" name="text9" descr="sci-ppt:C2-E33-009"/>
+              <a:t>Superheat is how far pₛₐₜ at the interface temperature</a:t>
+            </a:r>
+          </a:p>
+          <a:p>
+            <a:pPr algn="l">
+              <a:spcAft>
+                <a:spcPts val="0"/>
+              </a:spcAft>
+            </a:pPr>
+            <a:r>
+              <a:rPr sz="1200" b="0" i="0">
+                <a:solidFill>
+                  <a:srgbClr val="E7F0F3"/>
+                </a:solidFill>
+                <a:latin typeface="Arial"/>
+              </a:rPr>
+              <a:t>lies above p_d.</a:t>
+            </a:r>
+          </a:p>
+        </p:txBody>
+      </p:sp>
+      <p:sp>
+        <p:nvSpPr>
+          <p:cNvPr id="48" name="C2-E33 ellipse 46" descr="sci-ppt:o046"/>
+          <p:cNvSpPr/>
+          <p:nvPr/>
+        </p:nvSpPr>
+        <p:spPr>
+          <a:xfrm>
+            <a:off x="6752844" y="3991356"/>
+            <a:ext cx="82296" cy="82296"/>
+          </a:xfrm>
+          <a:prstGeom prst="ellipse">
+            <a:avLst/>
+          </a:prstGeom>
+          <a:solidFill>
+            <a:srgbClr val="8EDBD4"/>
+          </a:solidFill>
+          <a:ln w="12700">
+            <a:solidFill>
+              <a:srgbClr val="8EDBD4"/>
+            </a:solidFill>
+          </a:ln>
+          <a:effectLst/>
+        </p:spPr>
+        <p:txBody>
+          <a:bodyPr rtlCol="0" anchor="ctr"/>
+          <a:lstStyle/>
+          <a:p>
+            <a:pPr algn="ctr"/>
+          </a:p>
+        </p:txBody>
+      </p:sp>
+      <p:sp>
+        <p:nvSpPr>
+          <p:cNvPr id="49" name="C2-E33 text 47" descr="sci-ppt:o047"/>
           <p:cNvSpPr txBox="1"/>
           <p:nvPr/>
         </p:nvSpPr>
         <p:spPr>
           <a:xfrm>
-            <a:off x="6583680" y="1097280"/>
-            <a:ext cx="3657600" cy="321259"/>
+            <a:off x="6922007" y="4401312"/>
+            <a:ext cx="4736592" cy="417576"/>
           </a:xfrm>
           <a:prstGeom prst="rect">
             <a:avLst/>
@@ -3386,7 +5273,7 @@
           <a:effectLst/>
         </p:spPr>
         <p:txBody>
-          <a:bodyPr wrap="none" lIns="27432" rIns="27432" tIns="18288" bIns="18288" anchor="ctr">
+          <a:bodyPr wrap="none" lIns="18288" rIns="18288" tIns="18288" bIns="18288" anchor="t">
             <a:spAutoFit/>
           </a:bodyPr>
           <a:lstStyle/>
@@ -3397,907 +5284,75 @@
               </a:spcAft>
             </a:pPr>
             <a:r>
-              <a:rPr sz="1632" b="0" i="0">
+              <a:rPr sz="1200" b="0" i="0">
                 <a:solidFill>
                   <a:srgbClr val="E7F0F3"/>
                 </a:solidFill>
                 <a:latin typeface="Arial"/>
               </a:rPr>
-              <a:t>W</a:t>
-            </a:r>
-          </a:p>
-        </p:txBody>
-      </p:sp>
-      <p:cxnSp>
-        <p:nvCxnSpPr>
-          <p:cNvPr id="11" name="line10" descr="sci-ppt:C2-E33-010"/>
-          <p:cNvCxnSpPr/>
+              <a:t>More superheat shrinks r* and W*, but the barrier stays</a:t>
+            </a:r>
+          </a:p>
+          <a:p>
+            <a:pPr algn="l">
+              <a:spcAft>
+                <a:spcPts val="0"/>
+              </a:spcAft>
+            </a:pPr>
+            <a:r>
+              <a:rPr sz="1200" b="0" i="0">
+                <a:solidFill>
+                  <a:srgbClr val="E7F0F3"/>
+                </a:solidFill>
+                <a:latin typeface="Arial"/>
+              </a:rPr>
+              <a:t>positive.</a:t>
+            </a:r>
+          </a:p>
+        </p:txBody>
+      </p:sp>
+      <p:sp>
+        <p:nvSpPr>
+          <p:cNvPr id="50" name="C2-E33 ellipse 48" descr="sci-ppt:o048"/>
+          <p:cNvSpPr/>
           <p:nvPr/>
-        </p:nvCxnSpPr>
-        <p:spPr>
-          <a:xfrm flipV="1">
-            <a:off x="6766560" y="3896425"/>
-            <a:ext cx="100584" cy="5015"/>
-          </a:xfrm>
-          <a:prstGeom prst="line">
+        </p:nvSpPr>
+        <p:spPr>
+          <a:xfrm>
+            <a:off x="6752844" y="4454652"/>
+            <a:ext cx="82296" cy="82296"/>
+          </a:xfrm>
+          <a:prstGeom prst="ellipse">
             <a:avLst/>
           </a:prstGeom>
-          <a:ln w="25400">
+          <a:solidFill>
+            <a:srgbClr val="8EDBD4"/>
+          </a:solidFill>
+          <a:ln w="12700">
             <a:solidFill>
               <a:srgbClr val="8EDBD4"/>
             </a:solidFill>
           </a:ln>
           <a:effectLst/>
         </p:spPr>
-      </p:cxnSp>
-      <p:cxnSp>
-        <p:nvCxnSpPr>
-          <p:cNvPr id="12" name="line11" descr="sci-ppt:C2-E33-011"/>
-          <p:cNvCxnSpPr/>
-          <p:nvPr/>
-        </p:nvCxnSpPr>
-        <p:spPr>
-          <a:xfrm flipV="1">
-            <a:off x="6867144" y="3881894"/>
-            <a:ext cx="100584" cy="14531"/>
-          </a:xfrm>
-          <a:prstGeom prst="line">
-            <a:avLst/>
-          </a:prstGeom>
-          <a:ln w="25400">
-            <a:solidFill>
-              <a:srgbClr val="8EDBD4"/>
-            </a:solidFill>
-          </a:ln>
-          <a:effectLst/>
-        </p:spPr>
-      </p:cxnSp>
-      <p:cxnSp>
-        <p:nvCxnSpPr>
-          <p:cNvPr id="13" name="line12" descr="sci-ppt:C2-E33-012"/>
-          <p:cNvCxnSpPr/>
-          <p:nvPr/>
-        </p:nvCxnSpPr>
-        <p:spPr>
-          <a:xfrm flipV="1">
-            <a:off x="6967728" y="3858620"/>
-            <a:ext cx="100584" cy="23274"/>
-          </a:xfrm>
-          <a:prstGeom prst="line">
-            <a:avLst/>
-          </a:prstGeom>
-          <a:ln w="25400">
-            <a:solidFill>
-              <a:srgbClr val="8EDBD4"/>
-            </a:solidFill>
-          </a:ln>
-          <a:effectLst/>
-        </p:spPr>
-      </p:cxnSp>
-      <p:cxnSp>
-        <p:nvCxnSpPr>
-          <p:cNvPr id="14" name="line13" descr="sci-ppt:C2-E33-013"/>
-          <p:cNvCxnSpPr/>
-          <p:nvPr/>
-        </p:nvCxnSpPr>
-        <p:spPr>
-          <a:xfrm flipV="1">
-            <a:off x="7068312" y="3827373"/>
-            <a:ext cx="100584" cy="31247"/>
-          </a:xfrm>
-          <a:prstGeom prst="line">
-            <a:avLst/>
-          </a:prstGeom>
-          <a:ln w="25400">
-            <a:solidFill>
-              <a:srgbClr val="8EDBD4"/>
-            </a:solidFill>
-          </a:ln>
-          <a:effectLst/>
-        </p:spPr>
-      </p:cxnSp>
-      <p:cxnSp>
-        <p:nvCxnSpPr>
-          <p:cNvPr id="15" name="line14" descr="sci-ppt:C2-E33-014"/>
-          <p:cNvCxnSpPr/>
-          <p:nvPr/>
-        </p:nvCxnSpPr>
-        <p:spPr>
-          <a:xfrm flipV="1">
-            <a:off x="7168896" y="3788925"/>
-            <a:ext cx="100584" cy="38448"/>
-          </a:xfrm>
-          <a:prstGeom prst="line">
-            <a:avLst/>
-          </a:prstGeom>
-          <a:ln w="25400">
-            <a:solidFill>
-              <a:srgbClr val="8EDBD4"/>
-            </a:solidFill>
-          </a:ln>
-          <a:effectLst/>
-        </p:spPr>
-      </p:cxnSp>
-      <p:cxnSp>
-        <p:nvCxnSpPr>
-          <p:cNvPr id="16" name="line15" descr="sci-ppt:C2-E33-015"/>
-          <p:cNvCxnSpPr/>
-          <p:nvPr/>
-        </p:nvCxnSpPr>
-        <p:spPr>
-          <a:xfrm flipV="1">
-            <a:off x="7269480" y="3744048"/>
-            <a:ext cx="100584" cy="44877"/>
-          </a:xfrm>
-          <a:prstGeom prst="line">
-            <a:avLst/>
-          </a:prstGeom>
-          <a:ln w="25400">
-            <a:solidFill>
-              <a:srgbClr val="8EDBD4"/>
-            </a:solidFill>
-          </a:ln>
-          <a:effectLst/>
-        </p:spPr>
-      </p:cxnSp>
-      <p:cxnSp>
-        <p:nvCxnSpPr>
-          <p:cNvPr id="17" name="line16" descr="sci-ppt:C2-E33-016"/>
-          <p:cNvCxnSpPr/>
-          <p:nvPr/>
-        </p:nvCxnSpPr>
-        <p:spPr>
-          <a:xfrm flipV="1">
-            <a:off x="7370064" y="3693514"/>
-            <a:ext cx="100584" cy="50534"/>
-          </a:xfrm>
-          <a:prstGeom prst="line">
-            <a:avLst/>
-          </a:prstGeom>
-          <a:ln w="25400">
-            <a:solidFill>
-              <a:srgbClr val="8EDBD4"/>
-            </a:solidFill>
-          </a:ln>
-          <a:effectLst/>
-        </p:spPr>
-      </p:cxnSp>
-      <p:cxnSp>
-        <p:nvCxnSpPr>
-          <p:cNvPr id="18" name="line17" descr="sci-ppt:C2-E33-017"/>
-          <p:cNvCxnSpPr/>
-          <p:nvPr/>
-        </p:nvCxnSpPr>
-        <p:spPr>
-          <a:xfrm flipV="1">
-            <a:off x="7470648" y="3638092"/>
-            <a:ext cx="100583" cy="55422"/>
-          </a:xfrm>
-          <a:prstGeom prst="line">
-            <a:avLst/>
-          </a:prstGeom>
-          <a:ln w="25400">
-            <a:solidFill>
-              <a:srgbClr val="8EDBD4"/>
-            </a:solidFill>
-          </a:ln>
-          <a:effectLst/>
-        </p:spPr>
-      </p:cxnSp>
-      <p:cxnSp>
-        <p:nvCxnSpPr>
-          <p:cNvPr id="19" name="line18" descr="sci-ppt:C2-E33-018"/>
-          <p:cNvCxnSpPr/>
-          <p:nvPr/>
-        </p:nvCxnSpPr>
-        <p:spPr>
-          <a:xfrm flipV="1">
-            <a:off x="7571231" y="3578556"/>
-            <a:ext cx="100585" cy="59536"/>
-          </a:xfrm>
-          <a:prstGeom prst="line">
-            <a:avLst/>
-          </a:prstGeom>
-          <a:ln w="25400">
-            <a:solidFill>
-              <a:srgbClr val="8EDBD4"/>
-            </a:solidFill>
-          </a:ln>
-          <a:effectLst/>
-        </p:spPr>
-      </p:cxnSp>
-      <p:cxnSp>
-        <p:nvCxnSpPr>
-          <p:cNvPr id="20" name="line19" descr="sci-ppt:C2-E33-019"/>
-          <p:cNvCxnSpPr/>
-          <p:nvPr/>
-        </p:nvCxnSpPr>
-        <p:spPr>
-          <a:xfrm flipV="1">
-            <a:off x="7671816" y="3515677"/>
-            <a:ext cx="100584" cy="62879"/>
-          </a:xfrm>
-          <a:prstGeom prst="line">
-            <a:avLst/>
-          </a:prstGeom>
-          <a:ln w="25400">
-            <a:solidFill>
-              <a:srgbClr val="8EDBD4"/>
-            </a:solidFill>
-          </a:ln>
-          <a:effectLst/>
-        </p:spPr>
-      </p:cxnSp>
-      <p:cxnSp>
-        <p:nvCxnSpPr>
-          <p:cNvPr id="21" name="line20" descr="sci-ppt:C2-E33-020"/>
-          <p:cNvCxnSpPr/>
-          <p:nvPr/>
-        </p:nvCxnSpPr>
-        <p:spPr>
-          <a:xfrm flipV="1">
-            <a:off x="7772400" y="3450226"/>
-            <a:ext cx="100583" cy="65451"/>
-          </a:xfrm>
-          <a:prstGeom prst="line">
-            <a:avLst/>
-          </a:prstGeom>
-          <a:ln w="25400">
-            <a:solidFill>
-              <a:srgbClr val="8EDBD4"/>
-            </a:solidFill>
-          </a:ln>
-          <a:effectLst/>
-        </p:spPr>
-      </p:cxnSp>
-      <p:cxnSp>
-        <p:nvCxnSpPr>
-          <p:cNvPr id="22" name="line21" descr="sci-ppt:C2-E33-021"/>
-          <p:cNvCxnSpPr/>
-          <p:nvPr/>
-        </p:nvCxnSpPr>
-        <p:spPr>
-          <a:xfrm flipV="1">
-            <a:off x="7872983" y="3382975"/>
-            <a:ext cx="100585" cy="67251"/>
-          </a:xfrm>
-          <a:prstGeom prst="line">
-            <a:avLst/>
-          </a:prstGeom>
-          <a:ln w="25400">
-            <a:solidFill>
-              <a:srgbClr val="8EDBD4"/>
-            </a:solidFill>
-          </a:ln>
-          <a:effectLst/>
-        </p:spPr>
-      </p:cxnSp>
-      <p:cxnSp>
-        <p:nvCxnSpPr>
-          <p:cNvPr id="23" name="line22" descr="sci-ppt:C2-E33-022"/>
-          <p:cNvCxnSpPr/>
-          <p:nvPr/>
-        </p:nvCxnSpPr>
-        <p:spPr>
-          <a:xfrm flipV="1">
-            <a:off x="7973568" y="3314695"/>
-            <a:ext cx="100584" cy="68280"/>
-          </a:xfrm>
-          <a:prstGeom prst="line">
-            <a:avLst/>
-          </a:prstGeom>
-          <a:ln w="25400">
-            <a:solidFill>
-              <a:srgbClr val="8EDBD4"/>
-            </a:solidFill>
-          </a:ln>
-          <a:effectLst/>
-        </p:spPr>
-      </p:cxnSp>
-      <p:cxnSp>
-        <p:nvCxnSpPr>
-          <p:cNvPr id="24" name="line23" descr="sci-ppt:C2-E33-023"/>
-          <p:cNvCxnSpPr/>
-          <p:nvPr/>
-        </p:nvCxnSpPr>
-        <p:spPr>
-          <a:xfrm flipV="1">
-            <a:off x="8074152" y="3246158"/>
-            <a:ext cx="100584" cy="68537"/>
-          </a:xfrm>
-          <a:prstGeom prst="line">
-            <a:avLst/>
-          </a:prstGeom>
-          <a:ln w="25400">
-            <a:solidFill>
-              <a:srgbClr val="8EDBD4"/>
-            </a:solidFill>
-          </a:ln>
-          <a:effectLst/>
-        </p:spPr>
-      </p:cxnSp>
-      <p:cxnSp>
-        <p:nvCxnSpPr>
-          <p:cNvPr id="25" name="line24" descr="sci-ppt:C2-E33-024"/>
-          <p:cNvCxnSpPr/>
-          <p:nvPr/>
-        </p:nvCxnSpPr>
-        <p:spPr>
-          <a:xfrm flipV="1">
-            <a:off x="8174736" y="3178135"/>
-            <a:ext cx="100584" cy="68023"/>
-          </a:xfrm>
-          <a:prstGeom prst="line">
-            <a:avLst/>
-          </a:prstGeom>
-          <a:ln w="25400">
-            <a:solidFill>
-              <a:srgbClr val="8EDBD4"/>
-            </a:solidFill>
-          </a:ln>
-          <a:effectLst/>
-        </p:spPr>
-      </p:cxnSp>
-      <p:cxnSp>
-        <p:nvCxnSpPr>
-          <p:cNvPr id="26" name="line25" descr="sci-ppt:C2-E33-025"/>
-          <p:cNvCxnSpPr/>
-          <p:nvPr/>
-        </p:nvCxnSpPr>
-        <p:spPr>
-          <a:xfrm flipV="1">
-            <a:off x="8275320" y="3111398"/>
-            <a:ext cx="100584" cy="66737"/>
-          </a:xfrm>
-          <a:prstGeom prst="line">
-            <a:avLst/>
-          </a:prstGeom>
-          <a:ln w="25400">
-            <a:solidFill>
-              <a:srgbClr val="8EDBD4"/>
-            </a:solidFill>
-          </a:ln>
-          <a:effectLst/>
-        </p:spPr>
-      </p:cxnSp>
-      <p:cxnSp>
-        <p:nvCxnSpPr>
-          <p:cNvPr id="27" name="line26" descr="sci-ppt:C2-E33-026"/>
-          <p:cNvCxnSpPr/>
-          <p:nvPr/>
-        </p:nvCxnSpPr>
-        <p:spPr>
-          <a:xfrm flipV="1">
-            <a:off x="8375904" y="3046718"/>
-            <a:ext cx="100584" cy="64680"/>
-          </a:xfrm>
-          <a:prstGeom prst="line">
-            <a:avLst/>
-          </a:prstGeom>
-          <a:ln w="25400">
-            <a:solidFill>
-              <a:srgbClr val="8EDBD4"/>
-            </a:solidFill>
-          </a:ln>
-          <a:effectLst/>
-        </p:spPr>
-      </p:cxnSp>
-      <p:cxnSp>
-        <p:nvCxnSpPr>
-          <p:cNvPr id="28" name="line27" descr="sci-ppt:C2-E33-027"/>
-          <p:cNvCxnSpPr/>
-          <p:nvPr/>
-        </p:nvCxnSpPr>
-        <p:spPr>
-          <a:xfrm flipV="1">
-            <a:off x="8476488" y="2984868"/>
-            <a:ext cx="100584" cy="61850"/>
-          </a:xfrm>
-          <a:prstGeom prst="line">
-            <a:avLst/>
-          </a:prstGeom>
-          <a:ln w="25400">
-            <a:solidFill>
-              <a:srgbClr val="8EDBD4"/>
-            </a:solidFill>
-          </a:ln>
-          <a:effectLst/>
-        </p:spPr>
-      </p:cxnSp>
-      <p:cxnSp>
-        <p:nvCxnSpPr>
-          <p:cNvPr id="29" name="line28" descr="sci-ppt:C2-E33-028"/>
-          <p:cNvCxnSpPr/>
-          <p:nvPr/>
-        </p:nvCxnSpPr>
-        <p:spPr>
-          <a:xfrm flipV="1">
-            <a:off x="8577072" y="2926618"/>
-            <a:ext cx="100584" cy="58250"/>
-          </a:xfrm>
-          <a:prstGeom prst="line">
-            <a:avLst/>
-          </a:prstGeom>
-          <a:ln w="25400">
-            <a:solidFill>
-              <a:srgbClr val="8EDBD4"/>
-            </a:solidFill>
-          </a:ln>
-          <a:effectLst/>
-        </p:spPr>
-      </p:cxnSp>
-      <p:cxnSp>
-        <p:nvCxnSpPr>
-          <p:cNvPr id="30" name="line29" descr="sci-ppt:C2-E33-029"/>
-          <p:cNvCxnSpPr/>
-          <p:nvPr/>
-        </p:nvCxnSpPr>
-        <p:spPr>
-          <a:xfrm flipV="1">
-            <a:off x="8677656" y="2872740"/>
-            <a:ext cx="100584" cy="53878"/>
-          </a:xfrm>
-          <a:prstGeom prst="line">
-            <a:avLst/>
-          </a:prstGeom>
-          <a:ln w="25400">
-            <a:solidFill>
-              <a:srgbClr val="8EDBD4"/>
-            </a:solidFill>
-          </a:ln>
-          <a:effectLst/>
-        </p:spPr>
-      </p:cxnSp>
-      <p:cxnSp>
-        <p:nvCxnSpPr>
-          <p:cNvPr id="31" name="line30" descr="sci-ppt:C2-E33-030"/>
-          <p:cNvCxnSpPr/>
-          <p:nvPr/>
-        </p:nvCxnSpPr>
-        <p:spPr>
-          <a:xfrm flipV="1">
-            <a:off x="8778240" y="2824005"/>
-            <a:ext cx="100584" cy="48735"/>
-          </a:xfrm>
-          <a:prstGeom prst="line">
-            <a:avLst/>
-          </a:prstGeom>
-          <a:ln w="25400">
-            <a:solidFill>
-              <a:srgbClr val="8EDBD4"/>
-            </a:solidFill>
-          </a:ln>
-          <a:effectLst/>
-        </p:spPr>
-      </p:cxnSp>
-      <p:cxnSp>
-        <p:nvCxnSpPr>
-          <p:cNvPr id="32" name="line31" descr="sci-ppt:C2-E33-031"/>
-          <p:cNvCxnSpPr/>
-          <p:nvPr/>
-        </p:nvCxnSpPr>
-        <p:spPr>
-          <a:xfrm flipV="1">
-            <a:off x="8878824" y="2781185"/>
-            <a:ext cx="100584" cy="42820"/>
-          </a:xfrm>
-          <a:prstGeom prst="line">
-            <a:avLst/>
-          </a:prstGeom>
-          <a:ln w="25400">
-            <a:solidFill>
-              <a:srgbClr val="8EDBD4"/>
-            </a:solidFill>
-          </a:ln>
-          <a:effectLst/>
-        </p:spPr>
-      </p:cxnSp>
-      <p:cxnSp>
-        <p:nvCxnSpPr>
-          <p:cNvPr id="33" name="line32" descr="sci-ppt:C2-E33-032"/>
-          <p:cNvCxnSpPr/>
-          <p:nvPr/>
-        </p:nvCxnSpPr>
-        <p:spPr>
-          <a:xfrm flipV="1">
-            <a:off x="8979408" y="2745052"/>
-            <a:ext cx="100584" cy="36133"/>
-          </a:xfrm>
-          <a:prstGeom prst="line">
-            <a:avLst/>
-          </a:prstGeom>
-          <a:ln w="25400">
-            <a:solidFill>
-              <a:srgbClr val="8EDBD4"/>
-            </a:solidFill>
-          </a:ln>
-          <a:effectLst/>
-        </p:spPr>
-      </p:cxnSp>
-      <p:cxnSp>
-        <p:nvCxnSpPr>
-          <p:cNvPr id="34" name="line33" descr="sci-ppt:C2-E33-033"/>
-          <p:cNvCxnSpPr/>
-          <p:nvPr/>
-        </p:nvCxnSpPr>
-        <p:spPr>
-          <a:xfrm flipV="1">
-            <a:off x="9079992" y="2716377"/>
-            <a:ext cx="100584" cy="28675"/>
-          </a:xfrm>
-          <a:prstGeom prst="line">
-            <a:avLst/>
-          </a:prstGeom>
-          <a:ln w="25400">
-            <a:solidFill>
-              <a:srgbClr val="8EDBD4"/>
-            </a:solidFill>
-          </a:ln>
-          <a:effectLst/>
-        </p:spPr>
-      </p:cxnSp>
-      <p:cxnSp>
-        <p:nvCxnSpPr>
-          <p:cNvPr id="35" name="line34" descr="sci-ppt:C2-E33-034"/>
-          <p:cNvCxnSpPr/>
-          <p:nvPr/>
-        </p:nvCxnSpPr>
-        <p:spPr>
-          <a:xfrm flipV="1">
-            <a:off x="9180576" y="2695932"/>
-            <a:ext cx="100584" cy="20445"/>
-          </a:xfrm>
-          <a:prstGeom prst="line">
-            <a:avLst/>
-          </a:prstGeom>
-          <a:ln w="25400">
-            <a:solidFill>
-              <a:srgbClr val="8EDBD4"/>
-            </a:solidFill>
-          </a:ln>
-          <a:effectLst/>
-        </p:spPr>
-      </p:cxnSp>
-      <p:cxnSp>
-        <p:nvCxnSpPr>
-          <p:cNvPr id="36" name="line35" descr="sci-ppt:C2-E33-035"/>
-          <p:cNvCxnSpPr/>
-          <p:nvPr/>
-        </p:nvCxnSpPr>
-        <p:spPr>
-          <a:xfrm flipV="1">
-            <a:off x="9281160" y="2684487"/>
-            <a:ext cx="100584" cy="11445"/>
-          </a:xfrm>
-          <a:prstGeom prst="line">
-            <a:avLst/>
-          </a:prstGeom>
-          <a:ln w="25400">
-            <a:solidFill>
-              <a:srgbClr val="8EDBD4"/>
-            </a:solidFill>
-          </a:ln>
-          <a:effectLst/>
-        </p:spPr>
-      </p:cxnSp>
-      <p:cxnSp>
-        <p:nvCxnSpPr>
-          <p:cNvPr id="37" name="line36" descr="sci-ppt:C2-E33-036"/>
-          <p:cNvCxnSpPr/>
-          <p:nvPr/>
-        </p:nvCxnSpPr>
-        <p:spPr>
-          <a:xfrm flipV="1">
-            <a:off x="9381744" y="2682816"/>
-            <a:ext cx="100584" cy="1671"/>
-          </a:xfrm>
-          <a:prstGeom prst="line">
-            <a:avLst/>
-          </a:prstGeom>
-          <a:ln w="25400">
-            <a:solidFill>
-              <a:srgbClr val="8EDBD4"/>
-            </a:solidFill>
-          </a:ln>
-          <a:effectLst/>
-        </p:spPr>
-      </p:cxnSp>
-      <p:cxnSp>
-        <p:nvCxnSpPr>
-          <p:cNvPr id="38" name="line37" descr="sci-ppt:C2-E33-037"/>
-          <p:cNvCxnSpPr/>
-          <p:nvPr/>
-        </p:nvCxnSpPr>
-        <p:spPr>
-          <a:xfrm>
-            <a:off x="9482328" y="2682816"/>
-            <a:ext cx="100584" cy="8872"/>
-          </a:xfrm>
-          <a:prstGeom prst="line">
-            <a:avLst/>
-          </a:prstGeom>
-          <a:ln w="25400">
-            <a:solidFill>
-              <a:srgbClr val="8EDBD4"/>
-            </a:solidFill>
-          </a:ln>
-          <a:effectLst/>
-        </p:spPr>
-      </p:cxnSp>
-      <p:cxnSp>
-        <p:nvCxnSpPr>
-          <p:cNvPr id="39" name="line38" descr="sci-ppt:C2-E33-038"/>
-          <p:cNvCxnSpPr/>
-          <p:nvPr/>
-        </p:nvCxnSpPr>
-        <p:spPr>
-          <a:xfrm>
-            <a:off x="9582912" y="2691688"/>
-            <a:ext cx="100584" cy="20189"/>
-          </a:xfrm>
-          <a:prstGeom prst="line">
-            <a:avLst/>
-          </a:prstGeom>
-          <a:ln w="25400">
-            <a:solidFill>
-              <a:srgbClr val="8EDBD4"/>
-            </a:solidFill>
-          </a:ln>
-          <a:effectLst/>
-        </p:spPr>
-      </p:cxnSp>
-      <p:cxnSp>
-        <p:nvCxnSpPr>
-          <p:cNvPr id="40" name="line39" descr="sci-ppt:C2-E33-039"/>
-          <p:cNvCxnSpPr/>
-          <p:nvPr/>
-        </p:nvCxnSpPr>
-        <p:spPr>
-          <a:xfrm>
-            <a:off x="9683496" y="2711877"/>
-            <a:ext cx="100584" cy="32275"/>
-          </a:xfrm>
-          <a:prstGeom prst="line">
-            <a:avLst/>
-          </a:prstGeom>
-          <a:ln w="25400">
-            <a:solidFill>
-              <a:srgbClr val="8EDBD4"/>
-            </a:solidFill>
-          </a:ln>
-          <a:effectLst/>
-        </p:spPr>
-      </p:cxnSp>
-      <p:cxnSp>
-        <p:nvCxnSpPr>
-          <p:cNvPr id="41" name="line40" descr="sci-ppt:C2-E33-040"/>
-          <p:cNvCxnSpPr/>
-          <p:nvPr/>
-        </p:nvCxnSpPr>
-        <p:spPr>
-          <a:xfrm>
-            <a:off x="9784080" y="2744152"/>
-            <a:ext cx="100584" cy="45134"/>
-          </a:xfrm>
-          <a:prstGeom prst="line">
-            <a:avLst/>
-          </a:prstGeom>
-          <a:ln w="25400">
-            <a:solidFill>
-              <a:srgbClr val="8EDBD4"/>
-            </a:solidFill>
-          </a:ln>
-          <a:effectLst/>
-        </p:spPr>
-      </p:cxnSp>
-      <p:cxnSp>
-        <p:nvCxnSpPr>
-          <p:cNvPr id="42" name="line41" descr="sci-ppt:C2-E33-041"/>
-          <p:cNvCxnSpPr/>
-          <p:nvPr/>
-        </p:nvCxnSpPr>
-        <p:spPr>
-          <a:xfrm>
-            <a:off x="9884664" y="2789286"/>
-            <a:ext cx="100584" cy="58765"/>
-          </a:xfrm>
-          <a:prstGeom prst="line">
-            <a:avLst/>
-          </a:prstGeom>
-          <a:ln w="25400">
-            <a:solidFill>
-              <a:srgbClr val="8EDBD4"/>
-            </a:solidFill>
-          </a:ln>
-          <a:effectLst/>
-        </p:spPr>
-      </p:cxnSp>
-      <p:cxnSp>
-        <p:nvCxnSpPr>
-          <p:cNvPr id="43" name="line42" descr="sci-ppt:C2-E33-042"/>
-          <p:cNvCxnSpPr/>
-          <p:nvPr/>
-        </p:nvCxnSpPr>
-        <p:spPr>
-          <a:xfrm>
-            <a:off x="9985248" y="2848051"/>
-            <a:ext cx="100584" cy="73166"/>
-          </a:xfrm>
-          <a:prstGeom prst="line">
-            <a:avLst/>
-          </a:prstGeom>
-          <a:ln w="25400">
-            <a:solidFill>
-              <a:srgbClr val="8EDBD4"/>
-            </a:solidFill>
-          </a:ln>
-          <a:effectLst/>
-        </p:spPr>
-      </p:cxnSp>
-      <p:cxnSp>
-        <p:nvCxnSpPr>
-          <p:cNvPr id="44" name="line43" descr="sci-ppt:C2-E33-043"/>
-          <p:cNvCxnSpPr/>
-          <p:nvPr/>
-        </p:nvCxnSpPr>
-        <p:spPr>
-          <a:xfrm>
-            <a:off x="10085832" y="2921217"/>
-            <a:ext cx="100584" cy="88340"/>
-          </a:xfrm>
-          <a:prstGeom prst="line">
-            <a:avLst/>
-          </a:prstGeom>
-          <a:ln w="25400">
-            <a:solidFill>
-              <a:srgbClr val="8EDBD4"/>
-            </a:solidFill>
-          </a:ln>
-          <a:effectLst/>
-        </p:spPr>
-      </p:cxnSp>
-      <p:cxnSp>
-        <p:nvCxnSpPr>
-          <p:cNvPr id="45" name="line44" descr="sci-ppt:C2-E33-044"/>
-          <p:cNvCxnSpPr/>
-          <p:nvPr/>
-        </p:nvCxnSpPr>
-        <p:spPr>
-          <a:xfrm>
-            <a:off x="10186416" y="3009557"/>
-            <a:ext cx="100584" cy="104284"/>
-          </a:xfrm>
-          <a:prstGeom prst="line">
-            <a:avLst/>
-          </a:prstGeom>
-          <a:ln w="25400">
-            <a:solidFill>
-              <a:srgbClr val="8EDBD4"/>
-            </a:solidFill>
-          </a:ln>
-          <a:effectLst/>
-        </p:spPr>
-      </p:cxnSp>
-      <p:cxnSp>
-        <p:nvCxnSpPr>
-          <p:cNvPr id="46" name="line45" descr="sci-ppt:C2-E33-045"/>
-          <p:cNvCxnSpPr/>
-          <p:nvPr/>
-        </p:nvCxnSpPr>
-        <p:spPr>
-          <a:xfrm>
-            <a:off x="10287000" y="3113841"/>
-            <a:ext cx="100584" cy="121001"/>
-          </a:xfrm>
-          <a:prstGeom prst="line">
-            <a:avLst/>
-          </a:prstGeom>
-          <a:ln w="25400">
-            <a:solidFill>
-              <a:srgbClr val="8EDBD4"/>
-            </a:solidFill>
-          </a:ln>
-          <a:effectLst/>
-        </p:spPr>
-      </p:cxnSp>
-      <p:cxnSp>
-        <p:nvCxnSpPr>
-          <p:cNvPr id="47" name="line46" descr="sci-ppt:C2-E33-046"/>
-          <p:cNvCxnSpPr/>
-          <p:nvPr/>
-        </p:nvCxnSpPr>
-        <p:spPr>
-          <a:xfrm>
-            <a:off x="10387584" y="3234842"/>
-            <a:ext cx="100584" cy="138489"/>
-          </a:xfrm>
-          <a:prstGeom prst="line">
-            <a:avLst/>
-          </a:prstGeom>
-          <a:ln w="25400">
-            <a:solidFill>
-              <a:srgbClr val="8EDBD4"/>
-            </a:solidFill>
-          </a:ln>
-          <a:effectLst/>
-        </p:spPr>
-      </p:cxnSp>
-      <p:cxnSp>
-        <p:nvCxnSpPr>
-          <p:cNvPr id="48" name="line47" descr="sci-ppt:C2-E33-047"/>
-          <p:cNvCxnSpPr/>
-          <p:nvPr/>
-        </p:nvCxnSpPr>
-        <p:spPr>
-          <a:xfrm>
-            <a:off x="10488168" y="3373331"/>
-            <a:ext cx="100584" cy="156748"/>
-          </a:xfrm>
-          <a:prstGeom prst="line">
-            <a:avLst/>
-          </a:prstGeom>
-          <a:ln w="25400">
-            <a:solidFill>
-              <a:srgbClr val="8EDBD4"/>
-            </a:solidFill>
-          </a:ln>
-          <a:effectLst/>
-        </p:spPr>
-      </p:cxnSp>
-      <p:cxnSp>
-        <p:nvCxnSpPr>
-          <p:cNvPr id="49" name="line48" descr="sci-ppt:C2-E33-048"/>
-          <p:cNvCxnSpPr/>
-          <p:nvPr/>
-        </p:nvCxnSpPr>
-        <p:spPr>
-          <a:xfrm>
-            <a:off x="10588752" y="3530079"/>
-            <a:ext cx="100584" cy="175779"/>
-          </a:xfrm>
-          <a:prstGeom prst="line">
-            <a:avLst/>
-          </a:prstGeom>
-          <a:ln w="25400">
-            <a:solidFill>
-              <a:srgbClr val="8EDBD4"/>
-            </a:solidFill>
-          </a:ln>
-          <a:effectLst/>
-        </p:spPr>
-      </p:cxnSp>
-      <p:cxnSp>
-        <p:nvCxnSpPr>
-          <p:cNvPr id="50" name="line49" descr="sci-ppt:C2-E33-049"/>
-          <p:cNvCxnSpPr/>
-          <p:nvPr/>
-        </p:nvCxnSpPr>
-        <p:spPr>
-          <a:xfrm>
-            <a:off x="10689336" y="3705858"/>
-            <a:ext cx="100584" cy="195582"/>
-          </a:xfrm>
-          <a:prstGeom prst="line">
-            <a:avLst/>
-          </a:prstGeom>
-          <a:ln w="25400">
-            <a:solidFill>
-              <a:srgbClr val="8EDBD4"/>
-            </a:solidFill>
-          </a:ln>
-          <a:effectLst/>
-        </p:spPr>
-      </p:cxnSp>
-      <p:sp>
-        <p:nvSpPr>
-          <p:cNvPr id="51" name="text50" descr="sci-ppt:C2-E33-050"/>
+        <p:txBody>
+          <a:bodyPr rtlCol="0" anchor="ctr"/>
+          <a:lstStyle/>
+          <a:p>
+            <a:pPr algn="ctr"/>
+          </a:p>
+        </p:txBody>
+      </p:sp>
+      <p:sp>
+        <p:nvSpPr>
+          <p:cNvPr id="51" name="C2-E33 text 49" descr="sci-ppt:o049"/>
           <p:cNvSpPr txBox="1"/>
           <p:nvPr/>
         </p:nvSpPr>
         <p:spPr>
           <a:xfrm>
-            <a:off x="8595360" y="2194560"/>
-            <a:ext cx="2194560" cy="377952"/>
+            <a:off x="914400" y="6035040"/>
+            <a:ext cx="10972800" cy="239395"/>
           </a:xfrm>
           <a:prstGeom prst="rect">
             <a:avLst/>
@@ -4306,7 +5361,7 @@
           <a:effectLst/>
         </p:spPr>
         <p:txBody>
-          <a:bodyPr wrap="none" lIns="27432" rIns="27432" tIns="18288" bIns="18288" anchor="ctr">
+          <a:bodyPr wrap="none" lIns="18288" rIns="18288" tIns="18288" bIns="18288" anchor="t">
             <a:spAutoFit/>
           </a:bodyPr>
           <a:lstStyle/>
@@ -4317,27 +5372,27 @@
               </a:spcAft>
             </a:pPr>
             <a:r>
-              <a:rPr sz="1920" b="0" i="0">
+              <a:rPr sz="1250" b="0" i="0">
                 <a:solidFill>
                   <a:srgbClr val="E7F0F3"/>
                 </a:solidFill>
                 <a:latin typeface="Arial"/>
               </a:rPr>
-              <a:t>r*, W*</a:t>
-            </a:r>
-          </a:p>
-        </p:txBody>
-      </p:sp>
-      <p:sp>
-        <p:nvSpPr>
-          <p:cNvPr id="52" name="text51" descr="sci-ppt:C2-E33-051"/>
+              <a:t>The formulas assume homogeneous nucleation, a locally isothermal small nucleus and Δpₙ &gt; 0.</a:t>
+            </a:r>
+          </a:p>
+        </p:txBody>
+      </p:sp>
+      <p:sp>
+        <p:nvSpPr>
+          <p:cNvPr id="52" name="C2-E33 text 50" descr="sci-ppt:o050"/>
           <p:cNvSpPr txBox="1"/>
           <p:nvPr/>
         </p:nvSpPr>
         <p:spPr>
           <a:xfrm>
-            <a:off x="365760" y="4974336"/>
-            <a:ext cx="5547360" cy="321259"/>
+            <a:off x="320040" y="6510528"/>
+            <a:ext cx="11521440" cy="200660"/>
           </a:xfrm>
           <a:prstGeom prst="rect">
             <a:avLst/>
@@ -4346,7 +5401,7 @@
           <a:effectLst/>
         </p:spPr>
         <p:txBody>
-          <a:bodyPr wrap="none" lIns="27432" rIns="27432" tIns="18288" bIns="18288" anchor="ctr">
+          <a:bodyPr wrap="none" lIns="18288" rIns="18288" tIns="18288" bIns="18288" anchor="t">
             <a:spAutoFit/>
           </a:bodyPr>
           <a:lstStyle/>
@@ -4357,413 +5412,13 @@
               </a:spcAft>
             </a:pPr>
             <a:r>
-              <a:rPr sz="1632" b="0" i="0">
-                <a:solidFill>
-                  <a:srgbClr val="E7F0F3"/>
-                </a:solidFill>
-                <a:latin typeface="Arial"/>
-              </a:rPr>
-              <a:t>a: core outer radius</a:t>
-            </a:r>
-          </a:p>
-        </p:txBody>
-      </p:sp>
-      <p:sp>
-        <p:nvSpPr>
-          <p:cNvPr id="53" name="text52" descr="sci-ppt:C2-E33-052"/>
-          <p:cNvSpPr txBox="1"/>
-          <p:nvPr/>
-        </p:nvSpPr>
-        <p:spPr>
-          <a:xfrm>
-            <a:off x="365760" y="5266944"/>
-            <a:ext cx="5547360" cy="321259"/>
-          </a:xfrm>
-          <a:prstGeom prst="rect">
-            <a:avLst/>
-          </a:prstGeom>
-          <a:noFill/>
-          <a:effectLst/>
-        </p:spPr>
-        <p:txBody>
-          <a:bodyPr wrap="none" lIns="27432" rIns="27432" tIns="18288" bIns="18288" anchor="ctr">
-            <a:spAutoFit/>
-          </a:bodyPr>
-          <a:lstStyle/>
-          <a:p>
-            <a:pPr algn="l">
-              <a:spcAft>
-                <a:spcPts val="0"/>
-              </a:spcAft>
-            </a:pPr>
-            <a:r>
-              <a:rPr sz="1632" b="0" i="0">
-                <a:solidFill>
-                  <a:srgbClr val="E7F0F3"/>
-                </a:solidFill>
-                <a:latin typeface="Arial"/>
-              </a:rPr>
-              <a:t>Π_shell, p_c: confinement</a:t>
-            </a:r>
-          </a:p>
-        </p:txBody>
-      </p:sp>
-      <p:sp>
-        <p:nvSpPr>
-          <p:cNvPr id="54" name="text53" descr="sci-ppt:C2-E33-053"/>
-          <p:cNvSpPr txBox="1"/>
-          <p:nvPr/>
-        </p:nvSpPr>
-        <p:spPr>
-          <a:xfrm>
-            <a:off x="365760" y="5559552"/>
-            <a:ext cx="5547360" cy="321259"/>
-          </a:xfrm>
-          <a:prstGeom prst="rect">
-            <a:avLst/>
-          </a:prstGeom>
-          <a:noFill/>
-          <a:effectLst/>
-        </p:spPr>
-        <p:txBody>
-          <a:bodyPr wrap="none" lIns="27432" rIns="27432" tIns="18288" bIns="18288" anchor="ctr">
-            <a:spAutoFit/>
-          </a:bodyPr>
-          <a:lstStyle/>
-          <a:p>
-            <a:pPr algn="l">
-              <a:spcAft>
-                <a:spcPts val="0"/>
-              </a:spcAft>
-            </a:pPr>
-            <a:r>
-              <a:rPr sz="1632" b="0" i="0">
-                <a:solidFill>
-                  <a:srgbClr val="E7F0F3"/>
-                </a:solidFill>
-                <a:latin typeface="Arial"/>
-              </a:rPr>
-              <a:t>T_i, p_sat,PFC: thermal vapor driving</a:t>
-            </a:r>
-          </a:p>
-        </p:txBody>
-      </p:sp>
-      <p:sp>
-        <p:nvSpPr>
-          <p:cNvPr id="55" name="text54" descr="sci-ppt:C2-E33-054"/>
-          <p:cNvSpPr txBox="1"/>
-          <p:nvPr/>
-        </p:nvSpPr>
-        <p:spPr>
-          <a:xfrm>
-            <a:off x="365760" y="5852160"/>
-            <a:ext cx="5547360" cy="321259"/>
-          </a:xfrm>
-          <a:prstGeom prst="rect">
-            <a:avLst/>
-          </a:prstGeom>
-          <a:noFill/>
-          <a:effectLst/>
-        </p:spPr>
-        <p:txBody>
-          <a:bodyPr wrap="none" lIns="27432" rIns="27432" tIns="18288" bIns="18288" anchor="ctr">
-            <a:spAutoFit/>
-          </a:bodyPr>
-          <a:lstStyle/>
-          <a:p>
-            <a:pPr algn="l">
-              <a:spcAft>
-                <a:spcPts val="0"/>
-              </a:spcAft>
-            </a:pPr>
-            <a:r>
-              <a:rPr sz="1632" b="0" i="0">
-                <a:solidFill>
-                  <a:srgbClr val="E7F0F3"/>
-                </a:solidFill>
-                <a:latin typeface="Arial"/>
-              </a:rPr>
-              <a:t>r_*, W_*: internal barrier</a:t>
-            </a:r>
-          </a:p>
-        </p:txBody>
-      </p:sp>
-      <p:sp>
-        <p:nvSpPr>
-          <p:cNvPr id="56" name="text55" descr="sci-ppt:C2-E33-055"/>
-          <p:cNvSpPr txBox="1"/>
-          <p:nvPr/>
-        </p:nvSpPr>
-        <p:spPr>
-          <a:xfrm>
-            <a:off x="365760" y="6144768"/>
-            <a:ext cx="5547360" cy="321259"/>
-          </a:xfrm>
-          <a:prstGeom prst="rect">
-            <a:avLst/>
-          </a:prstGeom>
-          <a:noFill/>
-          <a:effectLst/>
-        </p:spPr>
-        <p:txBody>
-          <a:bodyPr wrap="none" lIns="27432" rIns="27432" tIns="18288" bIns="18288" anchor="ctr">
-            <a:spAutoFit/>
-          </a:bodyPr>
-          <a:lstStyle/>
-          <a:p>
-            <a:pPr algn="l">
-              <a:spcAft>
-                <a:spcPts val="0"/>
-              </a:spcAft>
-            </a:pPr>
-            <a:r>
-              <a:rPr sz="1632" b="0" i="0">
-                <a:solidFill>
-                  <a:srgbClr val="E7F0F3"/>
-                </a:solidFill>
-                <a:latin typeface="Arial"/>
-              </a:rPr>
-              <a:t>π: spherical factors</a:t>
-            </a:r>
-          </a:p>
-        </p:txBody>
-      </p:sp>
-      <p:sp>
-        <p:nvSpPr>
-          <p:cNvPr id="57" name="text56" descr="sci-ppt:C2-E33-056"/>
-          <p:cNvSpPr txBox="1"/>
-          <p:nvPr/>
-        </p:nvSpPr>
-        <p:spPr>
-          <a:xfrm>
-            <a:off x="6156960" y="4974336"/>
-            <a:ext cx="5547360" cy="321259"/>
-          </a:xfrm>
-          <a:prstGeom prst="rect">
-            <a:avLst/>
-          </a:prstGeom>
-          <a:noFill/>
-          <a:effectLst/>
-        </p:spPr>
-        <p:txBody>
-          <a:bodyPr wrap="none" lIns="27432" rIns="27432" tIns="18288" bIns="18288" anchor="ctr">
-            <a:spAutoFit/>
-          </a:bodyPr>
-          <a:lstStyle/>
-          <a:p>
-            <a:pPr algn="l">
-              <a:spcAft>
-                <a:spcPts val="0"/>
-              </a:spcAft>
-            </a:pPr>
-            <a:r>
-              <a:rPr sz="1632" b="0" i="0">
-                <a:solidFill>
-                  <a:srgbClr val="E7F0F3"/>
-                </a:solidFill>
-                <a:latin typeface="Arial"/>
-              </a:rPr>
-              <a:t>σ_pc: outer interface</a:t>
-            </a:r>
-          </a:p>
-        </p:txBody>
-      </p:sp>
-      <p:sp>
-        <p:nvSpPr>
-          <p:cNvPr id="58" name="text57" descr="sci-ppt:C2-E33-057"/>
-          <p:cNvSpPr txBox="1"/>
-          <p:nvPr/>
-        </p:nvSpPr>
-        <p:spPr>
-          <a:xfrm>
-            <a:off x="6156960" y="5266944"/>
-            <a:ext cx="5547360" cy="321259"/>
-          </a:xfrm>
-          <a:prstGeom prst="rect">
-            <a:avLst/>
-          </a:prstGeom>
-          <a:noFill/>
-          <a:effectLst/>
-        </p:spPr>
-        <p:txBody>
-          <a:bodyPr wrap="none" lIns="27432" rIns="27432" tIns="18288" bIns="18288" anchor="ctr">
-            <a:spAutoFit/>
-          </a:bodyPr>
-          <a:lstStyle/>
-          <a:p>
-            <a:pPr algn="l">
-              <a:spcAft>
-                <a:spcPts val="0"/>
-              </a:spcAft>
-            </a:pPr>
-            <a:r>
-              <a:rPr sz="1632" b="0" i="0">
-                <a:solidFill>
-                  <a:srgbClr val="E7F0F3"/>
-                </a:solidFill>
-                <a:latin typeface="Arial"/>
-              </a:rPr>
-              <a:t>p_d: core liquid state</a:t>
-            </a:r>
-          </a:p>
-        </p:txBody>
-      </p:sp>
-      <p:sp>
-        <p:nvSpPr>
-          <p:cNvPr id="59" name="text58" descr="sci-ppt:C2-E33-058"/>
-          <p:cNvSpPr txBox="1"/>
-          <p:nvPr/>
-        </p:nvSpPr>
-        <p:spPr>
-          <a:xfrm>
-            <a:off x="6156960" y="5559552"/>
-            <a:ext cx="5547360" cy="321259"/>
-          </a:xfrm>
-          <a:prstGeom prst="rect">
-            <a:avLst/>
-          </a:prstGeom>
-          <a:noFill/>
-          <a:effectLst/>
-        </p:spPr>
-        <p:txBody>
-          <a:bodyPr wrap="none" lIns="27432" rIns="27432" tIns="18288" bIns="18288" anchor="ctr">
-            <a:spAutoFit/>
-          </a:bodyPr>
-          <a:lstStyle/>
-          <a:p>
-            <a:pPr algn="l">
-              <a:spcAft>
-                <a:spcPts val="0"/>
-              </a:spcAft>
-            </a:pPr>
-            <a:r>
-              <a:rPr sz="1632" b="0" i="0">
-                <a:solidFill>
-                  <a:srgbClr val="E7F0F3"/>
-                </a:solidFill>
-                <a:latin typeface="Arial"/>
-              </a:rPr>
-              <a:t>Δp_n: net driving</a:t>
-            </a:r>
-          </a:p>
-        </p:txBody>
-      </p:sp>
-      <p:sp>
-        <p:nvSpPr>
-          <p:cNvPr id="60" name="text59" descr="sci-ppt:C2-E33-059"/>
-          <p:cNvSpPr txBox="1"/>
-          <p:nvPr/>
-        </p:nvSpPr>
-        <p:spPr>
-          <a:xfrm>
-            <a:off x="6156960" y="5852160"/>
-            <a:ext cx="5547360" cy="321259"/>
-          </a:xfrm>
-          <a:prstGeom prst="rect">
-            <a:avLst/>
-          </a:prstGeom>
-          <a:noFill/>
-          <a:effectLst/>
-        </p:spPr>
-        <p:txBody>
-          <a:bodyPr wrap="none" lIns="27432" rIns="27432" tIns="18288" bIns="18288" anchor="ctr">
-            <a:spAutoFit/>
-          </a:bodyPr>
-          <a:lstStyle/>
-          <a:p>
-            <a:pPr algn="l">
-              <a:spcAft>
-                <a:spcPts val="0"/>
-              </a:spcAft>
-            </a:pPr>
-            <a:r>
-              <a:rPr sz="1632" b="0" i="0">
-                <a:solidFill>
-                  <a:srgbClr val="E7F0F3"/>
-                </a:solidFill>
-                <a:latin typeface="Arial"/>
-              </a:rPr>
-              <a:t>σ_vp: internal nucleus interface</a:t>
-            </a:r>
-          </a:p>
-        </p:txBody>
-      </p:sp>
-      <p:sp>
-        <p:nvSpPr>
-          <p:cNvPr id="61" name="text60" descr="sci-ppt:C2-E33-060"/>
-          <p:cNvSpPr txBox="1"/>
-          <p:nvPr/>
-        </p:nvSpPr>
-        <p:spPr>
-          <a:xfrm>
-            <a:off x="365760" y="6632448"/>
-            <a:ext cx="11277600" cy="302361"/>
-          </a:xfrm>
-          <a:prstGeom prst="rect">
-            <a:avLst/>
-          </a:prstGeom>
-          <a:noFill/>
-          <a:effectLst/>
-        </p:spPr>
-        <p:txBody>
-          <a:bodyPr wrap="none" lIns="27432" rIns="27432" tIns="18288" bIns="18288" anchor="ctr">
-            <a:spAutoFit/>
-          </a:bodyPr>
-          <a:lstStyle/>
-          <a:p>
-            <a:pPr algn="l">
-              <a:spcAft>
-                <a:spcPts val="0"/>
-              </a:spcAft>
-            </a:pPr>
-            <a:r>
-              <a:rPr sz="1536" b="0" i="0">
+              <a:rPr sz="1000" b="0" i="0">
                 <a:solidFill>
                   <a:srgbClr val="B4C7D2"/>
                 </a:solidFill>
                 <a:latin typeface="Arial"/>
               </a:rPr>
-              <a:t>Outer confinement and internal barrier are separate</a:t>
-            </a:r>
-          </a:p>
-        </p:txBody>
-      </p:sp>
-      <p:sp>
-        <p:nvSpPr>
-          <p:cNvPr id="62" name="text61" descr="sci-ppt:C2-E33-061"/>
-          <p:cNvSpPr txBox="1"/>
-          <p:nvPr/>
-        </p:nvSpPr>
-        <p:spPr>
-          <a:xfrm>
-            <a:off x="365760" y="6925056"/>
-            <a:ext cx="11277600" cy="302361"/>
-          </a:xfrm>
-          <a:prstGeom prst="rect">
-            <a:avLst/>
-          </a:prstGeom>
-          <a:noFill/>
-          <a:effectLst/>
-        </p:spPr>
-        <p:txBody>
-          <a:bodyPr wrap="none" lIns="27432" rIns="27432" tIns="18288" bIns="18288" anchor="ctr">
-            <a:spAutoFit/>
-          </a:bodyPr>
-          <a:lstStyle/>
-          <a:p>
-            <a:pPr algn="l">
-              <a:spcAft>
-                <a:spcPts val="0"/>
-              </a:spcAft>
-            </a:pPr>
-            <a:r>
-              <a:rPr sz="1536" b="0" i="0">
-                <a:solidFill>
-                  <a:srgbClr val="B4C7D2"/>
-                </a:solidFill>
-                <a:latin typeface="Arial"/>
-              </a:rPr>
-              <a:t>Positive vapor driving is necessary in this control but not a guarantee</a:t>
+              <a:t>Reference formulas of the Defence 2 answer: Eqs. C2-E11, E14, E15, E16.</a:t>
             </a:r>
           </a:p>
         </p:txBody>
